--- a/Togo-environnement-hydrolique/rapport/Togo_Eau_Assainissement_Rapport.pptx
+++ b/Togo-environnement-hydrolique/rapport/Togo_Eau_Assainissement_Rapport.pptx
@@ -117,6 +117,411 @@
 </file>
 
 <file path=ppt/charts/chart1.xml><?xml version="1.0" encoding="utf-8"?>
+<c:chartSpace xmlns:c="http://schemas.openxmlformats.org/drawingml/2006/chart" xmlns:a="http://schemas.openxmlformats.org/drawingml/2006/main" xmlns:r="http://schemas.openxmlformats.org/officeDocument/2006/relationships">
+  <c:date1904 val="0"/>
+  <c:chart>
+    <c:title>
+      <c:tx>
+        <c:rich>
+          <a:bodyPr/>
+          <a:lstStyle/>
+          <a:p>
+            <a:r>
+              <a:rPr sz="1200"/>
+              <a:t>Part de la population (%)</a:t>
+            </a:r>
+          </a:p>
+        </c:rich>
+      </c:tx>
+      <c:layout/>
+      <c:overlay val="0"/>
+    </c:title>
+    <c:autoTitleDeleted val="0"/>
+    <c:plotArea>
+      <c:barChart>
+        <c:barDir val="bar"/>
+        <c:grouping val="clustered"/>
+        <c:ser>
+          <c:idx val="0"/>
+          <c:order val="0"/>
+          <c:tx>
+            <c:strRef>
+              <c:f>Sheet1!$B$1</c:f>
+              <c:strCache>
+                <c:ptCount val="1"/>
+                <c:pt idx="0">
+                  <c:v>Part de la population (%)</c:v>
+                </c:pt>
+              </c:strCache>
+            </c:strRef>
+          </c:tx>
+          <c:cat>
+            <c:strRef>
+              <c:f>Sheet1!$A$2:$A$4</c:f>
+              <c:strCache>
+                <c:ptCount val="3"/>
+                <c:pt idx="0">
+                  <c:v>moins d'1 km</c:v>
+                </c:pt>
+                <c:pt idx="1">
+                  <c:v>moins de 2,5 km</c:v>
+                </c:pt>
+                <c:pt idx="2">
+                  <c:v>moins de 5 km</c:v>
+                </c:pt>
+              </c:strCache>
+            </c:strRef>
+          </c:cat>
+          <c:val>
+            <c:numRef>
+              <c:f>Sheet1!$B$2:$B$4</c:f>
+              <c:numCache>
+                <c:formatCode>General</c:formatCode>
+                <c:ptCount val="3"/>
+                <c:pt idx="0">
+                  <c:v>5.4</c:v>
+                </c:pt>
+                <c:pt idx="1">
+                  <c:v>18.3</c:v>
+                </c:pt>
+                <c:pt idx="2">
+                  <c:v>32.3</c:v>
+                </c:pt>
+              </c:numCache>
+            </c:numRef>
+          </c:val>
+        </c:ser>
+        <c:axId val="-2068027336"/>
+        <c:axId val="-2113994440"/>
+      </c:barChart>
+      <c:catAx>
+        <c:axId val="-2068027336"/>
+        <c:scaling>
+          <c:orientation val="minMax"/>
+        </c:scaling>
+        <c:delete val="0"/>
+        <c:axPos val="l"/>
+        <c:majorTickMark val="out"/>
+        <c:minorTickMark val="none"/>
+        <c:tickLblPos val="nextTo"/>
+        <c:crossAx val="-2113994440"/>
+        <c:crosses val="autoZero"/>
+        <c:auto val="1"/>
+        <c:lblAlgn val="ctr"/>
+        <c:lblOffset val="100"/>
+        <c:noMultiLvlLbl val="0"/>
+      </c:catAx>
+      <c:valAx>
+        <c:axId val="-2113994440"/>
+        <c:scaling/>
+        <c:delete val="0"/>
+        <c:axPos val="b"/>
+        <c:majorGridlines/>
+        <c:majorTickMark val="out"/>
+        <c:minorTickMark val="none"/>
+        <c:tickLblPos val="nextTo"/>
+        <c:crossAx val="-2068027336"/>
+        <c:crosses val="autoZero"/>
+      </c:valAx>
+    </c:plotArea>
+    <c:dispBlanksAs val="gap"/>
+  </c:chart>
+  <c:txPr>
+    <a:bodyPr/>
+    <a:lstStyle/>
+    <a:p>
+      <a:pPr>
+        <a:defRPr sz="1000">
+          <a:solidFill>
+            <a:srgbClr val="475569"/>
+          </a:solidFill>
+          <a:latin typeface="Calibri"/>
+        </a:defRPr>
+      </a:pPr>
+      <a:endParaRPr lang="en-US"/>
+    </a:p>
+  </c:txPr>
+  <c:externalData r:id="rId1">
+    <c:autoUpdate val="0"/>
+  </c:externalData>
+</c:chartSpace>
+</file>
+
+<file path=ppt/charts/chart2.xml><?xml version="1.0" encoding="utf-8"?>
+<c:chartSpace xmlns:c="http://schemas.openxmlformats.org/drawingml/2006/chart" xmlns:a="http://schemas.openxmlformats.org/drawingml/2006/main" xmlns:r="http://schemas.openxmlformats.org/officeDocument/2006/relationships">
+  <c:date1904 val="0"/>
+  <c:chart>
+    <c:title>
+      <c:tx>
+        <c:rich>
+          <a:bodyPr/>
+          <a:lstStyle/>
+          <a:p>
+            <a:r>
+              <a:rPr sz="1200"/>
+              <a:t>Ouvrages dotés d'un plan de maintenance (%)</a:t>
+            </a:r>
+          </a:p>
+        </c:rich>
+      </c:tx>
+      <c:layout/>
+      <c:overlay val="0"/>
+    </c:title>
+    <c:autoTitleDeleted val="0"/>
+    <c:plotArea>
+      <c:barChart>
+        <c:barDir val="bar"/>
+        <c:grouping val="clustered"/>
+        <c:ser>
+          <c:idx val="0"/>
+          <c:order val="0"/>
+          <c:tx>
+            <c:strRef>
+              <c:f>Sheet1!$B$1</c:f>
+              <c:strCache>
+                <c:ptCount val="1"/>
+                <c:pt idx="0">
+                  <c:v>Ouvrages dotés d'un plan de maintenance (%)</c:v>
+                </c:pt>
+              </c:strCache>
+            </c:strRef>
+          </c:tx>
+          <c:cat>
+            <c:strRef>
+              <c:f>Sheet1!$A$2:$A$4</c:f>
+              <c:strCache>
+                <c:ptCount val="3"/>
+                <c:pt idx="0">
+                  <c:v>Kara</c:v>
+                </c:pt>
+                <c:pt idx="1">
+                  <c:v>Centrale</c:v>
+                </c:pt>
+                <c:pt idx="2">
+                  <c:v>Savanes</c:v>
+                </c:pt>
+              </c:strCache>
+            </c:strRef>
+          </c:cat>
+          <c:val>
+            <c:numRef>
+              <c:f>Sheet1!$B$2:$B$4</c:f>
+              <c:numCache>
+                <c:formatCode>General</c:formatCode>
+                <c:ptCount val="3"/>
+                <c:pt idx="0">
+                  <c:v>100.0</c:v>
+                </c:pt>
+                <c:pt idx="1">
+                  <c:v>46.2</c:v>
+                </c:pt>
+                <c:pt idx="2">
+                  <c:v>13.5</c:v>
+                </c:pt>
+              </c:numCache>
+            </c:numRef>
+          </c:val>
+        </c:ser>
+        <c:axId val="-2068027336"/>
+        <c:axId val="-2113994440"/>
+      </c:barChart>
+      <c:catAx>
+        <c:axId val="-2068027336"/>
+        <c:scaling>
+          <c:orientation val="minMax"/>
+        </c:scaling>
+        <c:delete val="0"/>
+        <c:axPos val="l"/>
+        <c:majorTickMark val="out"/>
+        <c:minorTickMark val="none"/>
+        <c:tickLblPos val="nextTo"/>
+        <c:crossAx val="-2113994440"/>
+        <c:crosses val="autoZero"/>
+        <c:auto val="1"/>
+        <c:lblAlgn val="ctr"/>
+        <c:lblOffset val="100"/>
+        <c:noMultiLvlLbl val="0"/>
+      </c:catAx>
+      <c:valAx>
+        <c:axId val="-2113994440"/>
+        <c:scaling/>
+        <c:delete val="0"/>
+        <c:axPos val="b"/>
+        <c:majorGridlines/>
+        <c:majorTickMark val="out"/>
+        <c:minorTickMark val="none"/>
+        <c:tickLblPos val="nextTo"/>
+        <c:crossAx val="-2068027336"/>
+        <c:crosses val="autoZero"/>
+      </c:valAx>
+    </c:plotArea>
+    <c:dispBlanksAs val="gap"/>
+  </c:chart>
+  <c:txPr>
+    <a:bodyPr/>
+    <a:lstStyle/>
+    <a:p>
+      <a:pPr>
+        <a:defRPr sz="1000">
+          <a:solidFill>
+            <a:srgbClr val="475569"/>
+          </a:solidFill>
+          <a:latin typeface="Calibri"/>
+        </a:defRPr>
+      </a:pPr>
+      <a:endParaRPr lang="en-US"/>
+    </a:p>
+  </c:txPr>
+  <c:externalData r:id="rId1">
+    <c:autoUpdate val="0"/>
+  </c:externalData>
+</c:chartSpace>
+</file>
+
+<file path=ppt/charts/chart3.xml><?xml version="1.0" encoding="utf-8"?>
+<c:chartSpace xmlns:c="http://schemas.openxmlformats.org/drawingml/2006/chart" xmlns:a="http://schemas.openxmlformats.org/drawingml/2006/main" xmlns:r="http://schemas.openxmlformats.org/officeDocument/2006/relationships">
+  <c:date1904 val="0"/>
+  <c:chart>
+    <c:title>
+      <c:tx>
+        <c:rich>
+          <a:bodyPr/>
+          <a:lstStyle/>
+          <a:p>
+            <a:r>
+              <a:rPr sz="1200"/>
+              <a:t>Habitants par ouvrage</a:t>
+            </a:r>
+          </a:p>
+        </c:rich>
+      </c:tx>
+      <c:layout/>
+      <c:overlay val="0"/>
+    </c:title>
+    <c:autoTitleDeleted val="0"/>
+    <c:plotArea>
+      <c:barChart>
+        <c:barDir val="bar"/>
+        <c:grouping val="clustered"/>
+        <c:ser>
+          <c:idx val="0"/>
+          <c:order val="0"/>
+          <c:tx>
+            <c:strRef>
+              <c:f>Sheet1!$B$1</c:f>
+              <c:strCache>
+                <c:ptCount val="1"/>
+                <c:pt idx="0">
+                  <c:v>Habitants par ouvrage</c:v>
+                </c:pt>
+              </c:strCache>
+            </c:strRef>
+          </c:tx>
+          <c:cat>
+            <c:strRef>
+              <c:f>Sheet1!$A$2:$A$6</c:f>
+              <c:strCache>
+                <c:ptCount val="5"/>
+                <c:pt idx="0">
+                  <c:v>Savanes</c:v>
+                </c:pt>
+                <c:pt idx="1">
+                  <c:v>Maritime</c:v>
+                </c:pt>
+                <c:pt idx="2">
+                  <c:v>Centrale</c:v>
+                </c:pt>
+                <c:pt idx="3">
+                  <c:v>Kara</c:v>
+                </c:pt>
+                <c:pt idx="4">
+                  <c:v>Plateaux</c:v>
+                </c:pt>
+              </c:strCache>
+            </c:strRef>
+          </c:cat>
+          <c:val>
+            <c:numRef>
+              <c:f>Sheet1!$B$2:$B$6</c:f>
+              <c:numCache>
+                <c:formatCode>General</c:formatCode>
+                <c:ptCount val="5"/>
+                <c:pt idx="0">
+                  <c:v>6819.0</c:v>
+                </c:pt>
+                <c:pt idx="1">
+                  <c:v>55229.0</c:v>
+                </c:pt>
+                <c:pt idx="2">
+                  <c:v>56629.0</c:v>
+                </c:pt>
+                <c:pt idx="3">
+                  <c:v>75843.0</c:v>
+                </c:pt>
+                <c:pt idx="4">
+                  <c:v>1669612.0</c:v>
+                </c:pt>
+              </c:numCache>
+            </c:numRef>
+          </c:val>
+        </c:ser>
+        <c:axId val="-2068027336"/>
+        <c:axId val="-2113994440"/>
+      </c:barChart>
+      <c:catAx>
+        <c:axId val="-2068027336"/>
+        <c:scaling>
+          <c:orientation val="minMax"/>
+        </c:scaling>
+        <c:delete val="0"/>
+        <c:axPos val="l"/>
+        <c:majorTickMark val="out"/>
+        <c:minorTickMark val="none"/>
+        <c:tickLblPos val="nextTo"/>
+        <c:crossAx val="-2113994440"/>
+        <c:crosses val="autoZero"/>
+        <c:auto val="1"/>
+        <c:lblAlgn val="ctr"/>
+        <c:lblOffset val="100"/>
+        <c:noMultiLvlLbl val="0"/>
+      </c:catAx>
+      <c:valAx>
+        <c:axId val="-2113994440"/>
+        <c:scaling/>
+        <c:delete val="0"/>
+        <c:axPos val="b"/>
+        <c:majorGridlines/>
+        <c:majorTickMark val="out"/>
+        <c:minorTickMark val="none"/>
+        <c:tickLblPos val="nextTo"/>
+        <c:crossAx val="-2068027336"/>
+        <c:crosses val="autoZero"/>
+      </c:valAx>
+    </c:plotArea>
+    <c:dispBlanksAs val="gap"/>
+  </c:chart>
+  <c:txPr>
+    <a:bodyPr/>
+    <a:lstStyle/>
+    <a:p>
+      <a:pPr>
+        <a:defRPr sz="1000">
+          <a:solidFill>
+            <a:srgbClr val="475569"/>
+          </a:solidFill>
+          <a:latin typeface="Calibri"/>
+        </a:defRPr>
+      </a:pPr>
+      <a:endParaRPr lang="en-US"/>
+    </a:p>
+  </c:txPr>
+  <c:externalData r:id="rId1">
+    <c:autoUpdate val="0"/>
+  </c:externalData>
+</c:chartSpace>
+</file>
+
+<file path=ppt/charts/chart4.xml><?xml version="1.0" encoding="utf-8"?>
 <c:chartSpace xmlns:c="http://schemas.openxmlformats.org/drawingml/2006/chart" xmlns:a="http://schemas.openxmlformats.org/drawingml/2006/main" xmlns:r="http://schemas.openxmlformats.org/officeDocument/2006/relationships">
   <c:date1904 val="0"/>
   <c:chart>
@@ -259,293 +664,7 @@
 </c:chartSpace>
 </file>
 
-<file path=ppt/charts/chart2.xml><?xml version="1.0" encoding="utf-8"?>
-<c:chartSpace xmlns:c="http://schemas.openxmlformats.org/drawingml/2006/chart" xmlns:a="http://schemas.openxmlformats.org/drawingml/2006/main" xmlns:r="http://schemas.openxmlformats.org/officeDocument/2006/relationships">
-  <c:date1904 val="0"/>
-  <c:chart>
-    <c:title>
-      <c:tx>
-        <c:rich>
-          <a:bodyPr/>
-          <a:lstStyle/>
-          <a:p>
-            <a:r>
-              <a:rPr sz="1200"/>
-              <a:t>Habitants par ouvrage</a:t>
-            </a:r>
-          </a:p>
-        </c:rich>
-      </c:tx>
-      <c:layout/>
-      <c:overlay val="0"/>
-    </c:title>
-    <c:autoTitleDeleted val="0"/>
-    <c:plotArea>
-      <c:barChart>
-        <c:barDir val="bar"/>
-        <c:grouping val="clustered"/>
-        <c:ser>
-          <c:idx val="0"/>
-          <c:order val="0"/>
-          <c:tx>
-            <c:strRef>
-              <c:f>Sheet1!$B$1</c:f>
-              <c:strCache>
-                <c:ptCount val="1"/>
-                <c:pt idx="0">
-                  <c:v>Habitants par ouvrage</c:v>
-                </c:pt>
-              </c:strCache>
-            </c:strRef>
-          </c:tx>
-          <c:cat>
-            <c:strRef>
-              <c:f>Sheet1!$A$2:$A$6</c:f>
-              <c:strCache>
-                <c:ptCount val="5"/>
-                <c:pt idx="0">
-                  <c:v>Savanes</c:v>
-                </c:pt>
-                <c:pt idx="1">
-                  <c:v>Maritime</c:v>
-                </c:pt>
-                <c:pt idx="2">
-                  <c:v>Centrale</c:v>
-                </c:pt>
-                <c:pt idx="3">
-                  <c:v>Kara</c:v>
-                </c:pt>
-                <c:pt idx="4">
-                  <c:v>Plateaux</c:v>
-                </c:pt>
-              </c:strCache>
-            </c:strRef>
-          </c:cat>
-          <c:val>
-            <c:numRef>
-              <c:f>Sheet1!$B$2:$B$6</c:f>
-              <c:numCache>
-                <c:formatCode>General</c:formatCode>
-                <c:ptCount val="5"/>
-                <c:pt idx="0">
-                  <c:v>6819.0</c:v>
-                </c:pt>
-                <c:pt idx="1">
-                  <c:v>55229.0</c:v>
-                </c:pt>
-                <c:pt idx="2">
-                  <c:v>56629.0</c:v>
-                </c:pt>
-                <c:pt idx="3">
-                  <c:v>75843.0</c:v>
-                </c:pt>
-                <c:pt idx="4">
-                  <c:v>1669612.0</c:v>
-                </c:pt>
-              </c:numCache>
-            </c:numRef>
-          </c:val>
-        </c:ser>
-        <c:axId val="-2068027336"/>
-        <c:axId val="-2113994440"/>
-      </c:barChart>
-      <c:catAx>
-        <c:axId val="-2068027336"/>
-        <c:scaling>
-          <c:orientation val="minMax"/>
-        </c:scaling>
-        <c:delete val="0"/>
-        <c:axPos val="l"/>
-        <c:majorTickMark val="out"/>
-        <c:minorTickMark val="none"/>
-        <c:tickLblPos val="nextTo"/>
-        <c:crossAx val="-2113994440"/>
-        <c:crosses val="autoZero"/>
-        <c:auto val="1"/>
-        <c:lblAlgn val="ctr"/>
-        <c:lblOffset val="100"/>
-        <c:noMultiLvlLbl val="0"/>
-      </c:catAx>
-      <c:valAx>
-        <c:axId val="-2113994440"/>
-        <c:scaling/>
-        <c:delete val="0"/>
-        <c:axPos val="b"/>
-        <c:majorGridlines/>
-        <c:majorTickMark val="out"/>
-        <c:minorTickMark val="none"/>
-        <c:tickLblPos val="nextTo"/>
-        <c:crossAx val="-2068027336"/>
-        <c:crosses val="autoZero"/>
-      </c:valAx>
-    </c:plotArea>
-    <c:dispBlanksAs val="gap"/>
-  </c:chart>
-  <c:txPr>
-    <a:bodyPr/>
-    <a:lstStyle/>
-    <a:p>
-      <a:pPr>
-        <a:defRPr sz="1000">
-          <a:solidFill>
-            <a:srgbClr val="475569"/>
-          </a:solidFill>
-          <a:latin typeface="Calibri"/>
-        </a:defRPr>
-      </a:pPr>
-      <a:endParaRPr lang="en-US"/>
-    </a:p>
-  </c:txPr>
-  <c:externalData r:id="rId1">
-    <c:autoUpdate val="0"/>
-  </c:externalData>
-</c:chartSpace>
-</file>
-
-<file path=ppt/charts/chart3.xml><?xml version="1.0" encoding="utf-8"?>
-<c:chartSpace xmlns:c="http://schemas.openxmlformats.org/drawingml/2006/chart" xmlns:a="http://schemas.openxmlformats.org/drawingml/2006/main" xmlns:r="http://schemas.openxmlformats.org/officeDocument/2006/relationships">
-  <c:date1904 val="0"/>
-  <c:chart>
-    <c:title>
-      <c:tx>
-        <c:rich>
-          <a:bodyPr/>
-          <a:lstStyle/>
-          <a:p>
-            <a:r>
-              <a:rPr sz="1200"/>
-              <a:t>Part équipée (%)</a:t>
-            </a:r>
-          </a:p>
-        </c:rich>
-      </c:tx>
-      <c:layout/>
-      <c:overlay val="0"/>
-    </c:title>
-    <c:autoTitleDeleted val="0"/>
-    <c:plotArea>
-      <c:barChart>
-        <c:barDir val="bar"/>
-        <c:grouping val="clustered"/>
-        <c:ser>
-          <c:idx val="0"/>
-          <c:order val="0"/>
-          <c:tx>
-            <c:strRef>
-              <c:f>Sheet1!$B$1</c:f>
-              <c:strCache>
-                <c:ptCount val="1"/>
-                <c:pt idx="0">
-                  <c:v>Part équipée (%)</c:v>
-                </c:pt>
-              </c:strCache>
-            </c:strRef>
-          </c:tx>
-          <c:cat>
-            <c:strRef>
-              <c:f>Sheet1!$A$2:$A$6</c:f>
-              <c:strCache>
-                <c:ptCount val="5"/>
-                <c:pt idx="0">
-                  <c:v>Très faible</c:v>
-                </c:pt>
-                <c:pt idx="1">
-                  <c:v>Faible</c:v>
-                </c:pt>
-                <c:pt idx="2">
-                  <c:v>Moyen</c:v>
-                </c:pt>
-                <c:pt idx="3">
-                  <c:v>Élevé</c:v>
-                </c:pt>
-                <c:pt idx="4">
-                  <c:v>Très élevé</c:v>
-                </c:pt>
-              </c:strCache>
-            </c:strRef>
-          </c:cat>
-          <c:val>
-            <c:numRef>
-              <c:f>Sheet1!$B$2:$B$6</c:f>
-              <c:numCache>
-                <c:formatCode>General</c:formatCode>
-                <c:ptCount val="5"/>
-                <c:pt idx="0">
-                  <c:v>13.2</c:v>
-                </c:pt>
-                <c:pt idx="1">
-                  <c:v>13.8</c:v>
-                </c:pt>
-                <c:pt idx="2">
-                  <c:v>24.2</c:v>
-                </c:pt>
-                <c:pt idx="3">
-                  <c:v>20.0</c:v>
-                </c:pt>
-                <c:pt idx="4">
-                  <c:v>42.9</c:v>
-                </c:pt>
-              </c:numCache>
-            </c:numRef>
-          </c:val>
-        </c:ser>
-        <c:axId val="-2068027336"/>
-        <c:axId val="-2113994440"/>
-      </c:barChart>
-      <c:catAx>
-        <c:axId val="-2068027336"/>
-        <c:scaling>
-          <c:orientation val="minMax"/>
-        </c:scaling>
-        <c:delete val="0"/>
-        <c:axPos val="l"/>
-        <c:majorTickMark val="out"/>
-        <c:minorTickMark val="none"/>
-        <c:tickLblPos val="nextTo"/>
-        <c:crossAx val="-2113994440"/>
-        <c:crosses val="autoZero"/>
-        <c:auto val="1"/>
-        <c:lblAlgn val="ctr"/>
-        <c:lblOffset val="100"/>
-        <c:noMultiLvlLbl val="0"/>
-      </c:catAx>
-      <c:valAx>
-        <c:axId val="-2113994440"/>
-        <c:scaling/>
-        <c:delete val="0"/>
-        <c:axPos val="b"/>
-        <c:majorGridlines/>
-        <c:majorTickMark val="out"/>
-        <c:minorTickMark val="none"/>
-        <c:tickLblPos val="nextTo"/>
-        <c:crossAx val="-2068027336"/>
-        <c:crosses val="autoZero"/>
-      </c:valAx>
-    </c:plotArea>
-    <c:dispBlanksAs val="gap"/>
-  </c:chart>
-  <c:txPr>
-    <a:bodyPr/>
-    <a:lstStyle/>
-    <a:p>
-      <a:pPr>
-        <a:defRPr sz="1000">
-          <a:solidFill>
-            <a:srgbClr val="475569"/>
-          </a:solidFill>
-          <a:latin typeface="Calibri"/>
-        </a:defRPr>
-      </a:pPr>
-      <a:endParaRPr lang="en-US"/>
-    </a:p>
-  </c:txPr>
-  <c:externalData r:id="rId1">
-    <c:autoUpdate val="0"/>
-  </c:externalData>
-</c:chartSpace>
-</file>
-
-<file path=ppt/charts/chart4.xml><?xml version="1.0" encoding="utf-8"?>
+<file path=ppt/charts/chart5.xml><?xml version="1.0" encoding="utf-8"?>
 <c:chartSpace xmlns:c="http://schemas.openxmlformats.org/drawingml/2006/chart" xmlns:a="http://schemas.openxmlformats.org/drawingml/2006/main" xmlns:r="http://schemas.openxmlformats.org/officeDocument/2006/relationships">
   <c:date1904 val="0"/>
   <c:chart>
@@ -627,6 +746,280 @@
                 </c:pt>
                 <c:pt idx="4">
                   <c:v>7072.0</c:v>
+                </c:pt>
+              </c:numCache>
+            </c:numRef>
+          </c:val>
+        </c:ser>
+        <c:axId val="-2068027336"/>
+        <c:axId val="-2113994440"/>
+      </c:barChart>
+      <c:catAx>
+        <c:axId val="-2068027336"/>
+        <c:scaling>
+          <c:orientation val="minMax"/>
+        </c:scaling>
+        <c:delete val="0"/>
+        <c:axPos val="l"/>
+        <c:majorTickMark val="out"/>
+        <c:minorTickMark val="none"/>
+        <c:tickLblPos val="nextTo"/>
+        <c:crossAx val="-2113994440"/>
+        <c:crosses val="autoZero"/>
+        <c:auto val="1"/>
+        <c:lblAlgn val="ctr"/>
+        <c:lblOffset val="100"/>
+        <c:noMultiLvlLbl val="0"/>
+      </c:catAx>
+      <c:valAx>
+        <c:axId val="-2113994440"/>
+        <c:scaling/>
+        <c:delete val="0"/>
+        <c:axPos val="b"/>
+        <c:majorGridlines/>
+        <c:majorTickMark val="out"/>
+        <c:minorTickMark val="none"/>
+        <c:tickLblPos val="nextTo"/>
+        <c:crossAx val="-2068027336"/>
+        <c:crosses val="autoZero"/>
+      </c:valAx>
+    </c:plotArea>
+    <c:dispBlanksAs val="gap"/>
+  </c:chart>
+  <c:txPr>
+    <a:bodyPr/>
+    <a:lstStyle/>
+    <a:p>
+      <a:pPr>
+        <a:defRPr sz="1000">
+          <a:solidFill>
+            <a:srgbClr val="475569"/>
+          </a:solidFill>
+          <a:latin typeface="Calibri"/>
+        </a:defRPr>
+      </a:pPr>
+      <a:endParaRPr lang="en-US"/>
+    </a:p>
+  </c:txPr>
+  <c:externalData r:id="rId1">
+    <c:autoUpdate val="0"/>
+  </c:externalData>
+</c:chartSpace>
+</file>
+
+<file path=ppt/charts/chart6.xml><?xml version="1.0" encoding="utf-8"?>
+<c:chartSpace xmlns:c="http://schemas.openxmlformats.org/drawingml/2006/chart" xmlns:a="http://schemas.openxmlformats.org/drawingml/2006/main" xmlns:r="http://schemas.openxmlformats.org/officeDocument/2006/relationships">
+  <c:date1904 val="0"/>
+  <c:chart>
+    <c:title>
+      <c:tx>
+        <c:rich>
+          <a:bodyPr/>
+          <a:lstStyle/>
+          <a:p>
+            <a:r>
+              <a:rPr sz="1200"/>
+              <a:t>Ouvrages à construire</a:t>
+            </a:r>
+          </a:p>
+        </c:rich>
+      </c:tx>
+      <c:layout/>
+      <c:overlay val="0"/>
+    </c:title>
+    <c:autoTitleDeleted val="0"/>
+    <c:plotArea>
+      <c:barChart>
+        <c:barDir val="bar"/>
+        <c:grouping val="clustered"/>
+        <c:ser>
+          <c:idx val="0"/>
+          <c:order val="0"/>
+          <c:tx>
+            <c:strRef>
+              <c:f>Sheet1!$B$1</c:f>
+              <c:strCache>
+                <c:ptCount val="1"/>
+                <c:pt idx="0">
+                  <c:v>Ouvrages à construire</c:v>
+                </c:pt>
+              </c:strCache>
+            </c:strRef>
+          </c:tx>
+          <c:cat>
+            <c:strRef>
+              <c:f>Sheet1!$A$2:$A$4</c:f>
+              <c:strCache>
+                <c:ptCount val="3"/>
+                <c:pt idx="0">
+                  <c:v>1 pour 300 hab.</c:v>
+                </c:pt>
+                <c:pt idx="1">
+                  <c:v>1 pour 1 000 hab.</c:v>
+                </c:pt>
+                <c:pt idx="2">
+                  <c:v>1 pour 5 000 hab.</c:v>
+                </c:pt>
+              </c:strCache>
+            </c:strRef>
+          </c:cat>
+          <c:val>
+            <c:numRef>
+              <c:f>Sheet1!$B$2:$B$4</c:f>
+              <c:numCache>
+                <c:formatCode>General</c:formatCode>
+                <c:ptCount val="3"/>
+                <c:pt idx="0">
+                  <c:v>26949</c:v>
+                </c:pt>
+                <c:pt idx="1">
+                  <c:v>7886</c:v>
+                </c:pt>
+                <c:pt idx="2">
+                  <c:v>1350</c:v>
+                </c:pt>
+              </c:numCache>
+            </c:numRef>
+          </c:val>
+        </c:ser>
+        <c:axId val="-2068027336"/>
+        <c:axId val="-2113994440"/>
+      </c:barChart>
+      <c:catAx>
+        <c:axId val="-2068027336"/>
+        <c:scaling>
+          <c:orientation val="minMax"/>
+        </c:scaling>
+        <c:delete val="0"/>
+        <c:axPos val="l"/>
+        <c:majorTickMark val="out"/>
+        <c:minorTickMark val="none"/>
+        <c:tickLblPos val="nextTo"/>
+        <c:crossAx val="-2113994440"/>
+        <c:crosses val="autoZero"/>
+        <c:auto val="1"/>
+        <c:lblAlgn val="ctr"/>
+        <c:lblOffset val="100"/>
+        <c:noMultiLvlLbl val="0"/>
+      </c:catAx>
+      <c:valAx>
+        <c:axId val="-2113994440"/>
+        <c:scaling/>
+        <c:delete val="0"/>
+        <c:axPos val="b"/>
+        <c:majorGridlines/>
+        <c:majorTickMark val="out"/>
+        <c:minorTickMark val="none"/>
+        <c:tickLblPos val="nextTo"/>
+        <c:crossAx val="-2068027336"/>
+        <c:crosses val="autoZero"/>
+      </c:valAx>
+    </c:plotArea>
+    <c:dispBlanksAs val="gap"/>
+  </c:chart>
+  <c:txPr>
+    <a:bodyPr/>
+    <a:lstStyle/>
+    <a:p>
+      <a:pPr>
+        <a:defRPr sz="1000">
+          <a:solidFill>
+            <a:srgbClr val="475569"/>
+          </a:solidFill>
+          <a:latin typeface="Calibri"/>
+        </a:defRPr>
+      </a:pPr>
+      <a:endParaRPr lang="en-US"/>
+    </a:p>
+  </c:txPr>
+  <c:externalData r:id="rId1">
+    <c:autoUpdate val="0"/>
+  </c:externalData>
+</c:chartSpace>
+</file>
+
+<file path=ppt/charts/chart7.xml><?xml version="1.0" encoding="utf-8"?>
+<c:chartSpace xmlns:c="http://schemas.openxmlformats.org/drawingml/2006/chart" xmlns:a="http://schemas.openxmlformats.org/drawingml/2006/main" xmlns:r="http://schemas.openxmlformats.org/officeDocument/2006/relationships">
+  <c:date1904 val="0"/>
+  <c:chart>
+    <c:title>
+      <c:tx>
+        <c:rich>
+          <a:bodyPr/>
+          <a:lstStyle/>
+          <a:p>
+            <a:r>
+              <a:rPr sz="1200"/>
+              <a:t>Milliards de FCFA par an</a:t>
+            </a:r>
+          </a:p>
+        </c:rich>
+      </c:tx>
+      <c:layout/>
+      <c:overlay val="0"/>
+    </c:title>
+    <c:autoTitleDeleted val="0"/>
+    <c:plotArea>
+      <c:barChart>
+        <c:barDir val="bar"/>
+        <c:grouping val="clustered"/>
+        <c:ser>
+          <c:idx val="0"/>
+          <c:order val="0"/>
+          <c:tx>
+            <c:strRef>
+              <c:f>Sheet1!$B$1</c:f>
+              <c:strCache>
+                <c:ptCount val="1"/>
+                <c:pt idx="0">
+                  <c:v>Milliards de FCFA par an</c:v>
+                </c:pt>
+              </c:strCache>
+            </c:strRef>
+          </c:tx>
+          <c:cat>
+            <c:strRef>
+              <c:f>Sheet1!$A$2:$A$6</c:f>
+              <c:strCache>
+                <c:ptCount val="5"/>
+                <c:pt idx="0">
+                  <c:v>2027</c:v>
+                </c:pt>
+                <c:pt idx="1">
+                  <c:v>2028</c:v>
+                </c:pt>
+                <c:pt idx="2">
+                  <c:v>2029</c:v>
+                </c:pt>
+                <c:pt idx="3">
+                  <c:v>2030</c:v>
+                </c:pt>
+                <c:pt idx="4">
+                  <c:v>2031</c:v>
+                </c:pt>
+              </c:strCache>
+            </c:strRef>
+          </c:cat>
+          <c:val>
+            <c:numRef>
+              <c:f>Sheet1!$B$2:$B$6</c:f>
+              <c:numCache>
+                <c:formatCode>General</c:formatCode>
+                <c:ptCount val="5"/>
+                <c:pt idx="0">
+                  <c:v>5.46</c:v>
+                </c:pt>
+                <c:pt idx="1">
+                  <c:v>5.53</c:v>
+                </c:pt>
+                <c:pt idx="2">
+                  <c:v>5.49</c:v>
+                </c:pt>
+                <c:pt idx="3">
+                  <c:v>5.54</c:v>
+                </c:pt>
+                <c:pt idx="4">
+                  <c:v>5.54</c:v>
                 </c:pt>
               </c:numCache>
             </c:numRef>
@@ -3735,7 +4128,7 @@
                 </a:solidFill>
                 <a:latin typeface="Calibri"/>
               </a:rPr>
-              <a:t>388 cantons cartographiés. Quatre pour cent d'entre eux abritent 35 % de la population, et l'inventaire national ne les couvre pas.</a:t>
+              <a:t>388 cantons cartographiés, et 26 kilomètres en médiane jusqu'à l'ouvrage recensé le plus proche. Quatre pour cent des cantons abritent 35 % de la population exposée, et l'inventaire national ne les couvre pas.</a:t>
             </a:r>
           </a:p>
           <a:p>
@@ -3924,7 +4317,7 @@
                 </a:solidFill>
                 <a:latin typeface="Calibri"/>
               </a:rPr>
-              <a:t>Le risque est concentré, la dotation ne l'est pas</a:t>
+              <a:t>Le risque est concentré, la dotation ne le suit pas</a:t>
             </a:r>
           </a:p>
           <a:p>
@@ -3940,7 +4333,7 @@
                 </a:solidFill>
                 <a:latin typeface="Calibri"/>
               </a:rPr>
-              <a:t>Dix-sept cantons abritent un tiers du pays ; le risque n'explique pas qui reçoit un ouvrage ; et le coût d'un forage est indépendant du nombre de personnes qu'il dessert. Ces trois résultats tiennent sur les données publiées.</a:t>
+              <a:t>Dix-sept cantons abritent un tiers du pays. L'implantation des ouvrages s'explique mieux par le périmètre des programmes que par le besoin, et la distance médiane à l'eau dit la même chose autrement. Le rattrapage est chiffré, daté et posé canton par canton.</a:t>
             </a:r>
           </a:p>
         </p:txBody>
@@ -4321,7 +4714,7 @@
                 </a:solidFill>
                 <a:latin typeface="Calibri"/>
               </a:rPr>
-              <a:t>cinq tabulaires, deux couches géographiques</a:t>
+              <a:t>six jeux nettoyés, à partir de sept ressources chargées</a:t>
             </a:r>
           </a:p>
         </p:txBody>
@@ -4886,7 +5279,7 @@
                 </a:solidFill>
                 <a:latin typeface="Calibri"/>
               </a:rPr>
-              <a:t>3 · Quatre pour cent des cantons, un tiers du pays</a:t>
+              <a:t>3 · Où est l'eau, et à quelle distance</a:t>
             </a:r>
           </a:p>
           <a:p>
@@ -4902,7 +5295,7 @@
                 </a:solidFill>
                 <a:latin typeface="Calibri"/>
               </a:rPr>
-              <a:t>Population par classe officielle de risque d'inondation</a:t>
+              <a:t>Population atteinte selon la distance à l'ouvrage recensé le plus proche</a:t>
             </a:r>
           </a:p>
         </p:txBody>
@@ -4988,7 +5381,7 @@
                 </a:solidFill>
                 <a:latin typeface="Calibri"/>
               </a:rPr>
-              <a:t>Cantons à risque élevé</a:t>
+              <a:t>Distance médiane à l'eau</a:t>
             </a:r>
           </a:p>
           <a:p>
@@ -5004,7 +5397,7 @@
                 </a:solidFill>
                 <a:latin typeface="Calibri"/>
               </a:rPr>
-              <a:t>17</a:t>
+              <a:t>26 km</a:t>
             </a:r>
           </a:p>
           <a:p>
@@ -5020,7 +5413,7 @@
                 </a:solidFill>
                 <a:latin typeface="Calibri"/>
               </a:rPr>
-              <a:t>4 % du maillage national</a:t>
+              <a:t>d'un canton à l'ouvrage recensé le plus proche</a:t>
             </a:r>
           </a:p>
         </p:txBody>
@@ -5059,7 +5452,7 @@
                 </a:solidFill>
                 <a:latin typeface="Calibri"/>
               </a:rPr>
-              <a:t>Habitants exposés</a:t>
+              <a:t>Cantons à plus de 10 km</a:t>
             </a:r>
           </a:p>
           <a:p>
@@ -5075,7 +5468,7 @@
                 </a:solidFill>
                 <a:latin typeface="Calibri"/>
               </a:rPr>
-              <a:t>2,9 M</a:t>
+              <a:t>288</a:t>
             </a:r>
           </a:p>
           <a:p>
@@ -5091,7 +5484,7 @@
                 </a:solidFill>
                 <a:latin typeface="Calibri"/>
               </a:rPr>
-              <a:t>35 % de la population</a:t>
+              <a:t>53 % de la population du pays</a:t>
             </a:r>
           </a:p>
         </p:txBody>
@@ -5130,7 +5523,7 @@
                 </a:solidFill>
                 <a:latin typeface="Calibri"/>
               </a:rPr>
-              <a:t>Ce que ce graphe interdit de dire</a:t>
+              <a:t>Ce que la distance mesure</a:t>
             </a:r>
           </a:p>
           <a:p>
@@ -5146,7 +5539,7 @@
                 </a:solidFill>
                 <a:latin typeface="Calibri"/>
               </a:rPr>
-              <a:t>« Le risque est marginal » ?</a:t>
+              <a:t>Pays mal couvert, ou mal recensé ?</a:t>
             </a:r>
           </a:p>
           <a:p>
@@ -5162,7 +5555,7 @@
                 </a:solidFill>
                 <a:latin typeface="Calibri"/>
               </a:rPr>
-              <a:t>Non — il est concentré</a:t>
+              <a:t>R = 0,41 — les ouvrages sont agglomérés</a:t>
             </a:r>
           </a:p>
           <a:p>
@@ -5178,7 +5571,7 @@
                 </a:solidFill>
                 <a:latin typeface="Calibri"/>
               </a:rPr>
-              <a:t>Compter les cantons donnerait 17 sur 388 et ferait passer le sujet pour anecdotique. Compter les habitants dit l'inverse.</a:t>
+              <a:t>L'indice de Clark-Evans vaut 1 quand des points sont répartis au hasard ; sous 0,5, ils sont massés. Cette distance mesure donc autant l'inventaire que le service : un canton sans ouvrage recensé n'est pas un canton sans eau, c'est un canton dont personne ne publie l'eau.</a:t>
             </a:r>
           </a:p>
         </p:txBody>
@@ -5269,7 +5662,7 @@
                 </a:solidFill>
                 <a:latin typeface="Calibri"/>
               </a:rPr>
-              <a:t>4 · Ce que le corpus ne dit pas</a:t>
+              <a:t>4 · L'état des ouvrages : le champ qui manque</a:t>
             </a:r>
           </a:p>
           <a:p>
@@ -5285,7 +5678,7 @@
                 </a:solidFill>
                 <a:latin typeface="Calibri"/>
               </a:rPr>
-              <a:t>Deux informations manquantes, toutes deux méthodologiques</a:t>
+              <a:t>Aucun état de fonctionnement dans le corpus — deux substituts, et ce qu'ils ne remplacent pas</a:t>
             </a:r>
           </a:p>
         </p:txBody>
@@ -5319,16 +5712,34 @@
           <a:p/>
         </p:txBody>
       </p:sp>
-      <p:sp>
-        <p:nvSpPr>
-          <p:cNvPr id="4" name="TextBox 3"/>
+      <p:graphicFrame>
+        <p:nvGraphicFramePr>
+          <p:cNvPr id="4" name="Chart 3"/>
+          <p:cNvGraphicFramePr>
+            <a:graphicFrameLocks noGrp="1"/>
+          </p:cNvGraphicFramePr>
+          <p:nvPr/>
+        </p:nvGraphicFramePr>
+        <p:xfrm>
+          <a:off x="548640" y="1645920"/>
+          <a:ext cx="6675120" cy="4206240"/>
+        </p:xfrm>
+        <a:graphic>
+          <a:graphicData uri="http://schemas.openxmlformats.org/drawingml/2006/chart">
+            <c:chart xmlns:c="http://schemas.openxmlformats.org/drawingml/2006/chart" r:id="rId2"/>
+          </a:graphicData>
+        </a:graphic>
+      </p:graphicFrame>
+      <p:sp>
+        <p:nvSpPr>
+          <p:cNvPr id="5" name="TextBox 4"/>
           <p:cNvSpPr txBox="1"/>
           <p:nvPr/>
         </p:nvSpPr>
         <p:spPr>
           <a:xfrm>
-            <a:off x="548640" y="1737360"/>
-            <a:ext cx="5486400" cy="1920240"/>
+            <a:off x="7589520" y="1828800"/>
+            <a:ext cx="3931920" cy="1280160"/>
           </a:xfrm>
           <a:prstGeom prst="rect">
             <a:avLst/>
@@ -5347,75 +5758,59 @@
               </a:spcAft>
             </a:pPr>
             <a:r>
-              <a:rPr sz="1200" b="1">
-                <a:solidFill>
-                  <a:srgbClr val="6366F1"/>
-                </a:solidFill>
-                <a:latin typeface="Calibri"/>
-              </a:rPr>
-              <a:t>Les seuils de classification</a:t>
-            </a:r>
-          </a:p>
-          <a:p>
-            <a:pPr algn="l">
-              <a:spcAft>
-                <a:spcPts val="500"/>
+              <a:rPr sz="1100" b="0">
+                <a:solidFill>
+                  <a:srgbClr val="94A3B8"/>
+                </a:solidFill>
+                <a:latin typeface="Calibri"/>
+              </a:rPr>
+              <a:t>Champs décrits, non diffusés</a:t>
+            </a:r>
+          </a:p>
+          <a:p>
+            <a:pPr algn="l">
+              <a:spcAft>
+                <a:spcPts val="200"/>
+              </a:spcAft>
+            </a:pPr>
+            <a:r>
+              <a:rPr sz="3200" b="1">
+                <a:solidFill>
+                  <a:srgbClr val="D03B3B"/>
+                </a:solidFill>
+                <a:latin typeface="Calibri"/>
+              </a:rPr>
+              <a:t>26</a:t>
+            </a:r>
+          </a:p>
+          <a:p>
+            <a:pPr algn="l">
+              <a:spcAft>
+                <a:spcPts val="0"/>
               </a:spcAft>
             </a:pPr>
             <a:r>
               <a:rPr sz="1000" b="0">
                 <a:solidFill>
-                  <a:srgbClr val="94A3B8"/>
-                </a:solidFill>
-                <a:latin typeface="Calibri"/>
-              </a:rPr>
-              <a:t>Où passent les classes de la carte officielle ?</a:t>
-            </a:r>
-          </a:p>
-          <a:p>
-            <a:pPr algn="l">
-              <a:spcAft>
-                <a:spcPts val="400"/>
-              </a:spcAft>
-            </a:pPr>
-            <a:r>
-              <a:rPr sz="1300" b="1">
-                <a:solidFill>
-                  <a:srgbClr val="0F172A"/>
-                </a:solidFill>
-                <a:latin typeface="Calibri"/>
-              </a:rPr>
-              <a:t>Sur une planche PDF sans texte</a:t>
-            </a:r>
-          </a:p>
-          <a:p>
-            <a:pPr algn="l">
-              <a:spcAft>
-                <a:spcPts val="0"/>
-              </a:spcAft>
-            </a:pPr>
-            <a:r>
-              <a:rPr sz="950" b="0">
-                <a:solidFill>
                   <a:srgbClr val="475569"/>
                 </a:solidFill>
                 <a:latin typeface="Calibri"/>
               </a:rPr>
-              <a:t>Les bornes 0,01 · 0,10 · 0,17 · 0,29 · 0,44 · 0,65 ne figurent dans aucun fichier du corpus. Elles ont été relevées en rendant l'image. Sans elles, notre carte serait juste et incomparable à celle du ministère.</a:t>
-            </a:r>
-          </a:p>
-        </p:txBody>
-      </p:sp>
-      <p:sp>
-        <p:nvSpPr>
-          <p:cNvPr id="5" name="TextBox 4"/>
+              <a:t>sur 33 que le dictionnaire TdE décrit</a:t>
+            </a:r>
+          </a:p>
+        </p:txBody>
+      </p:sp>
+      <p:sp>
+        <p:nvSpPr>
+          <p:cNvPr id="6" name="TextBox 5"/>
           <p:cNvSpPr txBox="1"/>
           <p:nvPr/>
         </p:nvSpPr>
         <p:spPr>
           <a:xfrm>
-            <a:off x="548640" y="3840479"/>
-            <a:ext cx="5486400" cy="1920240"/>
+            <a:off x="7589520" y="3200400"/>
+            <a:ext cx="3931920" cy="1280160"/>
           </a:xfrm>
           <a:prstGeom prst="rect">
             <a:avLst/>
@@ -5434,75 +5829,59 @@
               </a:spcAft>
             </a:pPr>
             <a:r>
-              <a:rPr sz="1200" b="1">
-                <a:solidFill>
-                  <a:srgbClr val="6366F1"/>
-                </a:solidFill>
-                <a:latin typeface="Calibri"/>
-              </a:rPr>
-              <a:t>La formule de l'indice</a:t>
-            </a:r>
-          </a:p>
-          <a:p>
-            <a:pPr algn="l">
-              <a:spcAft>
-                <a:spcPts val="500"/>
+              <a:rPr sz="1100" b="0">
+                <a:solidFill>
+                  <a:srgbClr val="94A3B8"/>
+                </a:solidFill>
+                <a:latin typeface="Calibri"/>
+              </a:rPr>
+              <a:t>Ouvrages réceptionnés, jamais remis</a:t>
+            </a:r>
+          </a:p>
+          <a:p>
+            <a:pPr algn="l">
+              <a:spcAft>
+                <a:spcPts val="200"/>
+              </a:spcAft>
+            </a:pPr>
+            <a:r>
+              <a:rPr sz="3200" b="1">
+                <a:solidFill>
+                  <a:srgbClr val="D03B3B"/>
+                </a:solidFill>
+                <a:latin typeface="Calibri"/>
+              </a:rPr>
+              <a:t>74</a:t>
+            </a:r>
+          </a:p>
+          <a:p>
+            <a:pPr algn="l">
+              <a:spcAft>
+                <a:spcPts val="0"/>
               </a:spcAft>
             </a:pPr>
             <a:r>
               <a:rPr sz="1000" b="0">
                 <a:solidFill>
-                  <a:srgbClr val="94A3B8"/>
-                </a:solidFill>
-                <a:latin typeface="Calibri"/>
-              </a:rPr>
-              <a:t>Le FRI publié est-il reproductible ?</a:t>
-            </a:r>
-          </a:p>
-          <a:p>
-            <a:pPr algn="l">
-              <a:spcAft>
-                <a:spcPts val="400"/>
-              </a:spcAft>
-            </a:pPr>
-            <a:r>
-              <a:rPr sz="1300" b="1">
-                <a:solidFill>
-                  <a:srgbClr val="0F172A"/>
-                </a:solidFill>
-                <a:latin typeface="Calibri"/>
-              </a:rPr>
-              <a:t>Oui, là où il est défini</a:t>
-            </a:r>
-          </a:p>
-          <a:p>
-            <a:pPr algn="l">
-              <a:spcAft>
-                <a:spcPts val="0"/>
-              </a:spcAft>
-            </a:pPr>
-            <a:r>
-              <a:rPr sz="950" b="0">
-                <a:solidFill>
                   <a:srgbClr val="475569"/>
                 </a:solidFill>
                 <a:latin typeface="Calibri"/>
               </a:rPr>
-              <a:t>La moyenne géométrique annoncée restitue l'indice sur les cantons dont les sept composantes sont non nulles. Sur les autres, un zéro annule le produit — et l'indice y est pourtant publié. Le traitement des zéros n'est écrit nulle part.</a:t>
-            </a:r>
-          </a:p>
-        </p:txBody>
-      </p:sp>
-      <p:sp>
-        <p:nvSpPr>
-          <p:cNvPr id="6" name="TextBox 5"/>
+              <a:t>délai médian de remise : 398 jours</a:t>
+            </a:r>
+          </a:p>
+        </p:txBody>
+      </p:sp>
+      <p:sp>
+        <p:nvSpPr>
+          <p:cNvPr id="7" name="TextBox 6"/>
           <p:cNvSpPr txBox="1"/>
           <p:nvPr/>
         </p:nvSpPr>
         <p:spPr>
           <a:xfrm>
-            <a:off x="6492240" y="1828800"/>
-            <a:ext cx="5029200" cy="1371600"/>
+            <a:off x="7589520" y="4572000"/>
+            <a:ext cx="3931920" cy="1371600"/>
           </a:xfrm>
           <a:prstGeom prst="rect">
             <a:avLst/>
@@ -5521,29 +5900,45 @@
               </a:spcAft>
             </a:pPr>
             <a:r>
-              <a:rPr sz="1100" b="0">
+              <a:rPr sz="1200" b="1">
+                <a:solidFill>
+                  <a:srgbClr val="6366F1"/>
+                </a:solidFill>
+                <a:latin typeface="Calibri"/>
+              </a:rPr>
+              <a:t>Le taux de fonctionnalité</a:t>
+            </a:r>
+          </a:p>
+          <a:p>
+            <a:pPr algn="l">
+              <a:spcAft>
+                <a:spcPts val="500"/>
+              </a:spcAft>
+            </a:pPr>
+            <a:r>
+              <a:rPr sz="1000" b="0">
                 <a:solidFill>
                   <a:srgbClr val="94A3B8"/>
                 </a:solidFill>
                 <a:latin typeface="Calibri"/>
               </a:rPr>
-              <a:t>Cantons où la formule tient</a:t>
-            </a:r>
-          </a:p>
-          <a:p>
-            <a:pPr algn="l">
-              <a:spcAft>
-                <a:spcPts val="200"/>
-              </a:spcAft>
-            </a:pPr>
-            <a:r>
-              <a:rPr sz="3200" b="1">
-                <a:solidFill>
-                  <a:srgbClr val="6366F1"/>
-                </a:solidFill>
-                <a:latin typeface="Calibri"/>
-              </a:rPr>
-              <a:t>42 / 388</a:t>
+              <a:t>Peut-on le calculer ?</a:t>
+            </a:r>
+          </a:p>
+          <a:p>
+            <a:pPr algn="l">
+              <a:spcAft>
+                <a:spcPts val="400"/>
+              </a:spcAft>
+            </a:pPr>
+            <a:r>
+              <a:rPr sz="1300" b="1">
+                <a:solidFill>
+                  <a:srgbClr val="0F172A"/>
+                </a:solidFill>
+                <a:latin typeface="Calibri"/>
+              </a:rPr>
+              <a:t>Non — aucun champ ne le porte</a:t>
             </a:r>
           </a:p>
           <a:p>
@@ -5553,84 +5948,13 @@
               </a:spcAft>
             </a:pPr>
             <a:r>
-              <a:rPr sz="1000" b="0">
+              <a:rPr sz="950" b="0">
                 <a:solidFill>
                   <a:srgbClr val="475569"/>
                 </a:solidFill>
                 <a:latin typeface="Calibri"/>
               </a:rPr>
-              <a:t>les autres portent au moins un zéro</a:t>
-            </a:r>
-          </a:p>
-        </p:txBody>
-      </p:sp>
-      <p:sp>
-        <p:nvSpPr>
-          <p:cNvPr id="7" name="TextBox 6"/>
-          <p:cNvSpPr txBox="1"/>
-          <p:nvPr/>
-        </p:nvSpPr>
-        <p:spPr>
-          <a:xfrm>
-            <a:off x="6492240" y="3383280"/>
-            <a:ext cx="5029200" cy="1371600"/>
-          </a:xfrm>
-          <a:prstGeom prst="rect">
-            <a:avLst/>
-          </a:prstGeom>
-          <a:noFill/>
-        </p:spPr>
-        <p:txBody>
-          <a:bodyPr wrap="square">
-            <a:spAutoFit/>
-          </a:bodyPr>
-          <a:lstStyle/>
-          <a:p>
-            <a:pPr algn="l">
-              <a:spcAft>
-                <a:spcPts val="200"/>
-              </a:spcAft>
-            </a:pPr>
-            <a:r>
-              <a:rPr sz="1100" b="0">
-                <a:solidFill>
-                  <a:srgbClr val="94A3B8"/>
-                </a:solidFill>
-                <a:latin typeface="Calibri"/>
-              </a:rPr>
-              <a:t>Champs décrits, non diffusés</a:t>
-            </a:r>
-          </a:p>
-          <a:p>
-            <a:pPr algn="l">
-              <a:spcAft>
-                <a:spcPts val="200"/>
-              </a:spcAft>
-            </a:pPr>
-            <a:r>
-              <a:rPr sz="3200" b="1">
-                <a:solidFill>
-                  <a:srgbClr val="D03B3B"/>
-                </a:solidFill>
-                <a:latin typeface="Calibri"/>
-              </a:rPr>
-              <a:t>26</a:t>
-            </a:r>
-          </a:p>
-          <a:p>
-            <a:pPr algn="l">
-              <a:spcAft>
-                <a:spcPts val="0"/>
-              </a:spcAft>
-            </a:pPr>
-            <a:r>
-              <a:rPr sz="1000" b="0">
-                <a:solidFill>
-                  <a:srgbClr val="475569"/>
-                </a:solidFill>
-                <a:latin typeface="Calibri"/>
-              </a:rPr>
-              <a:t>sur 33 que le dictionnaire décrit</a:t>
+              <a:t>Le sujet demande des taux de panne par région ; le corpus n'en donne pas les moyens : ni état, ni date de panne, ni abandon. Le plan de maintenance et la remise à l'exploitant sont des indices d'entretien, pas des mesures de service — un ouvrage doté d'un plan peut être à l'arrêt, et rien ici ne le dirait.</a:t>
             </a:r>
           </a:p>
         </p:txBody>
@@ -6033,7 +6357,7 @@
                 </a:solidFill>
                 <a:latin typeface="Calibri"/>
               </a:rPr>
-              <a:t>6 · Le risque est-il couvert par les ouvrages ?</a:t>
+              <a:t>6 · Le risque est concentré ; la dotation ne l'est pas</a:t>
             </a:r>
           </a:p>
           <a:p>
@@ -6049,7 +6373,7 @@
                 </a:solidFill>
                 <a:latin typeface="Calibri"/>
               </a:rPr>
-              <a:t>Part des cantons équipés, par classe de risque</a:t>
+              <a:t>Population par classe officielle de risque, et ce qui explique l'implantation des ouvrages</a:t>
             </a:r>
           </a:p>
         </p:txBody>
@@ -6109,8 +6433,8 @@
         </p:nvSpPr>
         <p:spPr>
           <a:xfrm>
-            <a:off x="7589520" y="1828800"/>
-            <a:ext cx="3931920" cy="2011680"/>
+            <a:off x="7589520" y="1737360"/>
+            <a:ext cx="3931920" cy="1188720"/>
           </a:xfrm>
           <a:prstGeom prst="rect">
             <a:avLst/>
@@ -6129,61 +6453,45 @@
               </a:spcAft>
             </a:pPr>
             <a:r>
-              <a:rPr sz="1200" b="1">
-                <a:solidFill>
-                  <a:srgbClr val="6366F1"/>
-                </a:solidFill>
-                <a:latin typeface="Calibri"/>
-              </a:rPr>
-              <a:t>Ce qui explique la dotation</a:t>
-            </a:r>
-          </a:p>
-          <a:p>
-            <a:pPr algn="l">
-              <a:spcAft>
-                <a:spcPts val="500"/>
+              <a:rPr sz="1100" b="0">
+                <a:solidFill>
+                  <a:srgbClr val="94A3B8"/>
+                </a:solidFill>
+                <a:latin typeface="Calibri"/>
+              </a:rPr>
+              <a:t>Cantons à risque élevé</a:t>
+            </a:r>
+          </a:p>
+          <a:p>
+            <a:pPr algn="l">
+              <a:spcAft>
+                <a:spcPts val="200"/>
+              </a:spcAft>
+            </a:pPr>
+            <a:r>
+              <a:rPr sz="3200" b="1">
+                <a:solidFill>
+                  <a:srgbClr val="D03B3B"/>
+                </a:solidFill>
+                <a:latin typeface="Calibri"/>
+              </a:rPr>
+              <a:t>17</a:t>
+            </a:r>
+          </a:p>
+          <a:p>
+            <a:pPr algn="l">
+              <a:spcAft>
+                <a:spcPts val="0"/>
               </a:spcAft>
             </a:pPr>
             <a:r>
               <a:rPr sz="1000" b="0">
                 <a:solidFill>
-                  <a:srgbClr val="94A3B8"/>
-                </a:solidFill>
-                <a:latin typeface="Calibri"/>
-              </a:rPr>
-              <a:t>Le besoin ou le périmètre du programme ?</a:t>
-            </a:r>
-          </a:p>
-          <a:p>
-            <a:pPr algn="l">
-              <a:spcAft>
-                <a:spcPts val="400"/>
-              </a:spcAft>
-            </a:pPr>
-            <a:r>
-              <a:rPr sz="1300" b="1">
-                <a:solidFill>
-                  <a:srgbClr val="0F172A"/>
-                </a:solidFill>
-                <a:latin typeface="Calibri"/>
-              </a:rPr>
-              <a:t>7 % expliqués par le besoin, 27 % avec la région</a:t>
-            </a:r>
-          </a:p>
-          <a:p>
-            <a:pPr algn="l">
-              <a:spcAft>
-                <a:spcPts val="0"/>
-              </a:spcAft>
-            </a:pPr>
-            <a:r>
-              <a:rPr sz="950" b="0">
-                <a:solidFill>
                   <a:srgbClr val="475569"/>
                 </a:solidFill>
                 <a:latin typeface="Calibri"/>
               </a:rPr>
-              <a:t>Population, risque et richesse expliquent peu. Ajouter la région quadruple le pouvoir explicatif sans que le risque devienne significatif : la dotation suit le découpage des programmes, non l'exposition qu'ils invoquent.</a:t>
+              <a:t>4 % du maillage, 2,9 M habitants</a:t>
             </a:r>
           </a:p>
         </p:txBody>
@@ -6196,8 +6504,8 @@
         </p:nvSpPr>
         <p:spPr>
           <a:xfrm>
-            <a:off x="7589520" y="4114800"/>
-            <a:ext cx="3931920" cy="1463040"/>
+            <a:off x="7589520" y="3063240"/>
+            <a:ext cx="3931920" cy="1371600"/>
           </a:xfrm>
           <a:prstGeom prst="rect">
             <a:avLst/>
@@ -6216,15 +6524,86 @@
               </a:spcAft>
             </a:pPr>
             <a:r>
-              <a:rPr sz="1100" b="0">
+              <a:rPr sz="1200" b="1">
+                <a:solidFill>
+                  <a:srgbClr val="6366F1"/>
+                </a:solidFill>
+                <a:latin typeface="Calibri"/>
+              </a:rPr>
+              <a:t>Ce qui explique la dotation</a:t>
+            </a:r>
+          </a:p>
+          <a:p>
+            <a:pPr algn="l">
+              <a:spcAft>
+                <a:spcPts val="500"/>
+              </a:spcAft>
+            </a:pPr>
+            <a:r>
+              <a:rPr sz="1000" b="0">
                 <a:solidFill>
                   <a:srgbClr val="94A3B8"/>
                 </a:solidFill>
                 <a:latin typeface="Calibri"/>
               </a:rPr>
-              <a:t>Cantons prioritaires</a:t>
-            </a:r>
-          </a:p>
+              <a:t>Le besoin, ou le périmètre du programme ?</a:t>
+            </a:r>
+          </a:p>
+          <a:p>
+            <a:pPr algn="l">
+              <a:spcAft>
+                <a:spcPts val="400"/>
+              </a:spcAft>
+            </a:pPr>
+            <a:r>
+              <a:rPr sz="1300" b="1">
+                <a:solidFill>
+                  <a:srgbClr val="0F172A"/>
+                </a:solidFill>
+                <a:latin typeface="Calibri"/>
+              </a:rPr>
+              <a:t>7 % par le besoin, 27 % avec la région</a:t>
+            </a:r>
+          </a:p>
+          <a:p>
+            <a:pPr algn="l">
+              <a:spcAft>
+                <a:spcPts val="0"/>
+              </a:spcAft>
+            </a:pPr>
+            <a:r>
+              <a:rPr sz="950" b="0">
+                <a:solidFill>
+                  <a:srgbClr val="475569"/>
+                </a:solidFill>
+                <a:latin typeface="Calibri"/>
+              </a:rPr>
+              <a:t>Population, risque et richesse expliquent peu ; ajouter la région quadruple le pouvoir explicatif. 12 cantons exposés — 1,7 M habitants — n'ont aucun ouvrage recensé.</a:t>
+            </a:r>
+          </a:p>
+        </p:txBody>
+      </p:sp>
+      <p:sp>
+        <p:nvSpPr>
+          <p:cNvPr id="7" name="TextBox 6"/>
+          <p:cNvSpPr txBox="1"/>
+          <p:nvPr/>
+        </p:nvSpPr>
+        <p:spPr>
+          <a:xfrm>
+            <a:off x="7589520" y="4572000"/>
+            <a:ext cx="3931920" cy="1371600"/>
+          </a:xfrm>
+          <a:prstGeom prst="rect">
+            <a:avLst/>
+          </a:prstGeom>
+          <a:noFill/>
+        </p:spPr>
+        <p:txBody>
+          <a:bodyPr wrap="square">
+            <a:spAutoFit/>
+          </a:bodyPr>
+          <a:lstStyle/>
           <a:p>
             <a:pPr algn="l">
               <a:spcAft>
@@ -6232,13 +6611,45 @@
               </a:spcAft>
             </a:pPr>
             <a:r>
-              <a:rPr sz="3200" b="1">
-                <a:solidFill>
-                  <a:srgbClr val="D03B3B"/>
-                </a:solidFill>
-                <a:latin typeface="Calibri"/>
-              </a:rPr>
-              <a:t>12</a:t>
+              <a:rPr sz="1200" b="1">
+                <a:solidFill>
+                  <a:srgbClr val="6366F1"/>
+                </a:solidFill>
+                <a:latin typeface="Calibri"/>
+              </a:rPr>
+              <a:t>L'objection attendue</a:t>
+            </a:r>
+          </a:p>
+          <a:p>
+            <a:pPr algn="l">
+              <a:spcAft>
+                <a:spcPts val="500"/>
+              </a:spcAft>
+            </a:pPr>
+            <a:r>
+              <a:rPr sz="1000" b="0">
+                <a:solidFill>
+                  <a:srgbClr val="94A3B8"/>
+                </a:solidFill>
+                <a:latin typeface="Calibri"/>
+              </a:rPr>
+              <a:t>L'indice ne classe-t-il que les cantons peuplés ?</a:t>
+            </a:r>
+          </a:p>
+          <a:p>
+            <a:pPr algn="l">
+              <a:spcAft>
+                <a:spcPts val="400"/>
+              </a:spcAft>
+            </a:pPr>
+            <a:r>
+              <a:rPr sz="1300" b="1">
+                <a:solidFill>
+                  <a:srgbClr val="0F172A"/>
+                </a:solidFill>
+                <a:latin typeface="Calibri"/>
+              </a:rPr>
+              <a:t>Non — ρ = 0,94 sans la population</a:t>
             </a:r>
           </a:p>
           <a:p>
@@ -6248,20 +6659,20 @@
               </a:spcAft>
             </a:pPr>
             <a:r>
-              <a:rPr sz="1000" b="0">
+              <a:rPr sz="950" b="0">
                 <a:solidFill>
                   <a:srgbClr val="475569"/>
                 </a:solidFill>
                 <a:latin typeface="Calibri"/>
               </a:rPr>
-              <a:t>exposés et sans ouvrage — 1,7 M habitants</a:t>
-            </a:r>
-          </a:p>
-        </p:txBody>
-      </p:sp>
-      <p:sp>
-        <p:nvSpPr>
-          <p:cNvPr id="7" name="TextBox 6"/>
+              <a:t>En retirant la composante démographique et en recalculant l'indice, les cantons se déplacent de 3 places en médiane, sur les 42 où la formule officielle se reproduit. Le classement tient sans la population : il ne range pas les gens, il range un terrain.</a:t>
+            </a:r>
+          </a:p>
+        </p:txBody>
+      </p:sp>
+      <p:sp>
+        <p:nvSpPr>
+          <p:cNvPr id="8" name="TextBox 7"/>
           <p:cNvSpPr txBox="1"/>
           <p:nvPr/>
         </p:nvSpPr>
@@ -6421,8 +6832,8 @@
         </p:nvSpPr>
         <p:spPr>
           <a:xfrm>
-            <a:off x="7589520" y="1828800"/>
-            <a:ext cx="3931920" cy="1280160"/>
+            <a:off x="7589520" y="1737360"/>
+            <a:ext cx="3931920" cy="1188720"/>
           </a:xfrm>
           <a:prstGeom prst="rect">
             <a:avLst/>
@@ -6492,8 +6903,8 @@
         </p:nvSpPr>
         <p:spPr>
           <a:xfrm>
-            <a:off x="7589520" y="3291840"/>
-            <a:ext cx="3931920" cy="2560320"/>
+            <a:off x="7589520" y="3063240"/>
+            <a:ext cx="3931920" cy="1188720"/>
           </a:xfrm>
           <a:prstGeom prst="rect">
             <a:avLst/>
@@ -6512,6 +6923,77 @@
               </a:spcAft>
             </a:pPr>
             <a:r>
+              <a:rPr sz="1100" b="0">
+                <a:solidFill>
+                  <a:srgbClr val="94A3B8"/>
+                </a:solidFill>
+                <a:latin typeface="Calibri"/>
+              </a:rPr>
+              <a:t>Élasticité à la population</a:t>
+            </a:r>
+          </a:p>
+          <a:p>
+            <a:pPr algn="l">
+              <a:spcAft>
+                <a:spcPts val="200"/>
+              </a:spcAft>
+            </a:pPr>
+            <a:r>
+              <a:rPr sz="3200" b="1">
+                <a:solidFill>
+                  <a:srgbClr val="D03B3B"/>
+                </a:solidFill>
+                <a:latin typeface="Calibri"/>
+              </a:rPr>
+              <a:t>0,55</a:t>
+            </a:r>
+          </a:p>
+          <a:p>
+            <a:pPr algn="l">
+              <a:spcAft>
+                <a:spcPts val="0"/>
+              </a:spcAft>
+            </a:pPr>
+            <a:r>
+              <a:rPr sz="1000" b="0">
+                <a:solidFill>
+                  <a:srgbClr val="475569"/>
+                </a:solidFill>
+                <a:latin typeface="Calibri"/>
+              </a:rPr>
+              <a:t>sur 35 cantons dotés · Gini de 0,39</a:t>
+            </a:r>
+          </a:p>
+        </p:txBody>
+      </p:sp>
+      <p:sp>
+        <p:nvSpPr>
+          <p:cNvPr id="7" name="TextBox 6"/>
+          <p:cNvSpPr txBox="1"/>
+          <p:nvPr/>
+        </p:nvSpPr>
+        <p:spPr>
+          <a:xfrm>
+            <a:off x="7589520" y="4389120"/>
+            <a:ext cx="3931920" cy="1554480"/>
+          </a:xfrm>
+          <a:prstGeom prst="rect">
+            <a:avLst/>
+          </a:prstGeom>
+          <a:noFill/>
+        </p:spPr>
+        <p:txBody>
+          <a:bodyPr wrap="square">
+            <a:spAutoFit/>
+          </a:bodyPr>
+          <a:lstStyle/>
+          <a:p>
+            <a:pPr algn="l">
+              <a:spcAft>
+                <a:spcPts val="200"/>
+              </a:spcAft>
+            </a:pPr>
+            <a:r>
               <a:rPr sz="1200" b="1">
                 <a:solidFill>
                   <a:srgbClr val="6366F1"/>
@@ -6566,14 +7048,14 @@
                 </a:solidFill>
                 <a:latin typeface="Calibri"/>
               </a:rPr>
-              <a:t>L'élasticité du coût au nombre de bénéficiaires est statistiquement nulle : le coût par habitant ne dépend que du lieu choisi. C'est une contrainte qu'on subit, ou un levier qu'on actionne.</a:t>
-            </a:r>
-          </a:p>
-        </p:txBody>
-      </p:sp>
-      <p:sp>
-        <p:nvSpPr>
-          <p:cNvPr id="7" name="TextBox 6"/>
+              <a:t>L'élasticité du coût au nombre de bénéficiaires est statistiquement nulle : le coût par habitant se décide donc en choisissant OÙ implanter, pas en négociant le prix. La mise en concurrence a par ailleurs dégagé 17 % sous l'estimation initiale, pour 3,5 Md FCFA décaissés — une marge déjà disponible.</a:t>
+            </a:r>
+          </a:p>
+        </p:txBody>
+      </p:sp>
+      <p:sp>
+        <p:nvSpPr>
+          <p:cNvPr id="8" name="TextBox 7"/>
           <p:cNvSpPr txBox="1"/>
           <p:nvPr/>
         </p:nvSpPr>
@@ -6657,7 +7139,7 @@
                 </a:solidFill>
                 <a:latin typeface="Calibri"/>
               </a:rPr>
-              <a:t>8 · L'argent suit-il les habitants ?</a:t>
+              <a:t>8 · Combien d'ouvrages manquent, et à quel prix</a:t>
             </a:r>
           </a:p>
           <a:p>
@@ -6673,7 +7155,7 @@
                 </a:solidFill>
                 <a:latin typeface="Calibri"/>
               </a:rPr>
-              <a:t>Ce que la répartition observée dit d'elle-même</a:t>
+              <a:t>Trois seuils de desserte, trois programmes — le seuil est un choix politique, pas un résultat</a:t>
             </a:r>
           </a:p>
         </p:txBody>
@@ -6707,16 +7189,34 @@
           <a:p/>
         </p:txBody>
       </p:sp>
-      <p:sp>
-        <p:nvSpPr>
-          <p:cNvPr id="4" name="TextBox 3"/>
+      <p:graphicFrame>
+        <p:nvGraphicFramePr>
+          <p:cNvPr id="4" name="Chart 3"/>
+          <p:cNvGraphicFramePr>
+            <a:graphicFrameLocks noGrp="1"/>
+          </p:cNvGraphicFramePr>
+          <p:nvPr/>
+        </p:nvGraphicFramePr>
+        <p:xfrm>
+          <a:off x="548640" y="1645920"/>
+          <a:ext cx="6675120" cy="4206240"/>
+        </p:xfrm>
+        <a:graphic>
+          <a:graphicData uri="http://schemas.openxmlformats.org/drawingml/2006/chart">
+            <c:chart xmlns:c="http://schemas.openxmlformats.org/drawingml/2006/chart" r:id="rId2"/>
+          </a:graphicData>
+        </a:graphic>
+      </p:graphicFrame>
+      <p:sp>
+        <p:nvSpPr>
+          <p:cNvPr id="5" name="TextBox 4"/>
           <p:cNvSpPr txBox="1"/>
           <p:nvPr/>
         </p:nvSpPr>
         <p:spPr>
           <a:xfrm>
-            <a:off x="548640" y="1737360"/>
-            <a:ext cx="3566160" cy="1371600"/>
+            <a:off x="7589520" y="1737360"/>
+            <a:ext cx="3931920" cy="1188720"/>
           </a:xfrm>
           <a:prstGeom prst="rect">
             <a:avLst/>
@@ -6741,7 +7241,7 @@
                 </a:solidFill>
                 <a:latin typeface="Calibri"/>
               </a:rPr>
-              <a:t>Élasticité à la population</a:t>
+              <a:t>Ouvrages pour aligner les régions</a:t>
             </a:r>
           </a:p>
           <a:p>
@@ -6753,11 +7253,11 @@
             <a:r>
               <a:rPr sz="3200" b="1">
                 <a:solidFill>
-                  <a:srgbClr val="D03B3B"/>
-                </a:solidFill>
-                <a:latin typeface="Calibri"/>
-              </a:rPr>
-              <a:t>0,55</a:t>
+                  <a:srgbClr val="6366F1"/>
+                </a:solidFill>
+                <a:latin typeface="Calibri"/>
+              </a:rPr>
+              <a:t>34</a:t>
             </a:r>
           </a:p>
           <a:p>
@@ -6773,21 +7273,21 @@
                 </a:solidFill>
                 <a:latin typeface="Calibri"/>
               </a:rPr>
-              <a:t>estimée sur 35 cantons dotés</a:t>
-            </a:r>
-          </a:p>
-        </p:txBody>
-      </p:sp>
-      <p:sp>
-        <p:nvSpPr>
-          <p:cNvPr id="5" name="TextBox 4"/>
+              <a:t>sur la médiane nationale — 567,9 M FCFA</a:t>
+            </a:r>
+          </a:p>
+        </p:txBody>
+      </p:sp>
+      <p:sp>
+        <p:nvSpPr>
+          <p:cNvPr id="6" name="TextBox 5"/>
           <p:cNvSpPr txBox="1"/>
           <p:nvPr/>
         </p:nvSpPr>
         <p:spPr>
           <a:xfrm>
-            <a:off x="4297680" y="1737360"/>
-            <a:ext cx="3566160" cy="1371600"/>
+            <a:off x="7589520" y="3063240"/>
+            <a:ext cx="3931920" cy="1188720"/>
           </a:xfrm>
           <a:prstGeom prst="rect">
             <a:avLst/>
@@ -6812,7 +7312,7 @@
                 </a:solidFill>
                 <a:latin typeface="Calibri"/>
               </a:rPr>
-              <a:t>Gini par habitant</a:t>
+              <a:t>Scénario 1 pour 1 000 habitants</a:t>
             </a:r>
           </a:p>
           <a:p>
@@ -6824,11 +7324,11 @@
             <a:r>
               <a:rPr sz="3200" b="1">
                 <a:solidFill>
-                  <a:srgbClr val="6366F1"/>
-                </a:solidFill>
-                <a:latin typeface="Calibri"/>
-              </a:rPr>
-              <a:t>0,39</a:t>
+                  <a:srgbClr val="D03B3B"/>
+                </a:solidFill>
+                <a:latin typeface="Calibri"/>
+              </a:rPr>
+              <a:t>131,7 Md</a:t>
             </a:r>
           </a:p>
           <a:p>
@@ -6844,21 +7344,21 @@
                 </a:solidFill>
                 <a:latin typeface="Calibri"/>
               </a:rPr>
-              <a:t>rapport interdécile de 6,3</a:t>
-            </a:r>
-          </a:p>
-        </p:txBody>
-      </p:sp>
-      <p:sp>
-        <p:nvSpPr>
-          <p:cNvPr id="6" name="TextBox 5"/>
+              <a:t>7 886 ouvrages à construire</a:t>
+            </a:r>
+          </a:p>
+        </p:txBody>
+      </p:sp>
+      <p:sp>
+        <p:nvSpPr>
+          <p:cNvPr id="7" name="TextBox 6"/>
           <p:cNvSpPr txBox="1"/>
           <p:nvPr/>
         </p:nvSpPr>
         <p:spPr>
           <a:xfrm>
-            <a:off x="8046720" y="1737360"/>
-            <a:ext cx="3474720" cy="1371600"/>
+            <a:off x="7589520" y="4389120"/>
+            <a:ext cx="3931920" cy="1554480"/>
           </a:xfrm>
           <a:prstGeom prst="rect">
             <a:avLst/>
@@ -6877,29 +7377,45 @@
               </a:spcAft>
             </a:pPr>
             <a:r>
-              <a:rPr sz="1100" b="0">
+              <a:rPr sz="1200" b="1">
+                <a:solidFill>
+                  <a:srgbClr val="6366F1"/>
+                </a:solidFill>
+                <a:latin typeface="Calibri"/>
+              </a:rPr>
+              <a:t>Le prix unitaire</a:t>
+            </a:r>
+          </a:p>
+          <a:p>
+            <a:pPr algn="l">
+              <a:spcAft>
+                <a:spcPts val="500"/>
+              </a:spcAft>
+            </a:pPr>
+            <a:r>
+              <a:rPr sz="1000" b="0">
                 <a:solidFill>
                   <a:srgbClr val="94A3B8"/>
                 </a:solidFill>
                 <a:latin typeface="Calibri"/>
               </a:rPr>
-              <a:t>Montant décaissé</a:t>
-            </a:r>
-          </a:p>
-          <a:p>
-            <a:pPr algn="l">
-              <a:spcAft>
-                <a:spcPts val="200"/>
-              </a:spcAft>
-            </a:pPr>
-            <a:r>
-              <a:rPr sz="3200" b="1">
-                <a:solidFill>
-                  <a:srgbClr val="6366F1"/>
-                </a:solidFill>
-                <a:latin typeface="Calibri"/>
-              </a:rPr>
-              <a:t>3,5 Md</a:t>
+              <a:t>D'où vient-il ?</a:t>
+            </a:r>
+          </a:p>
+          <a:p>
+            <a:pPr algn="l">
+              <a:spcAft>
+                <a:spcPts val="400"/>
+              </a:spcAft>
+            </a:pPr>
+            <a:r>
+              <a:rPr sz="1300" b="1">
+                <a:solidFill>
+                  <a:srgbClr val="0F172A"/>
+                </a:solidFill>
+                <a:latin typeface="Calibri"/>
+              </a:rPr>
+              <a:t>16,7 M FCFA, médiane observée</a:t>
             </a:r>
           </a:p>
           <a:p>
@@ -6909,100 +7425,13 @@
               </a:spcAft>
             </a:pPr>
             <a:r>
-              <a:rPr sz="1000" b="0">
+              <a:rPr sz="950" b="0">
                 <a:solidFill>
                   <a:srgbClr val="475569"/>
                 </a:solidFill>
                 <a:latin typeface="Calibri"/>
               </a:rPr>
-              <a:t>17 % sous l'estimation initiale</a:t>
-            </a:r>
-          </a:p>
-        </p:txBody>
-      </p:sp>
-      <p:sp>
-        <p:nvSpPr>
-          <p:cNvPr id="7" name="TextBox 6"/>
-          <p:cNvSpPr txBox="1"/>
-          <p:nvPr/>
-        </p:nvSpPr>
-        <p:spPr>
-          <a:xfrm>
-            <a:off x="548640" y="3383280"/>
-            <a:ext cx="5486400" cy="2286000"/>
-          </a:xfrm>
-          <a:prstGeom prst="rect">
-            <a:avLst/>
-          </a:prstGeom>
-          <a:noFill/>
-        </p:spPr>
-        <p:txBody>
-          <a:bodyPr wrap="square">
-            <a:spAutoFit/>
-          </a:bodyPr>
-          <a:lstStyle/>
-          <a:p>
-            <a:pPr algn="l">
-              <a:spcAft>
-                <a:spcPts val="200"/>
-              </a:spcAft>
-            </a:pPr>
-            <a:r>
-              <a:rPr sz="1200" b="1">
-                <a:solidFill>
-                  <a:srgbClr val="6366F1"/>
-                </a:solidFill>
-                <a:latin typeface="Calibri"/>
-              </a:rPr>
-              <a:t>Une dotation régressive</a:t>
-            </a:r>
-          </a:p>
-          <a:p>
-            <a:pPr algn="l">
-              <a:spcAft>
-                <a:spcPts val="500"/>
-              </a:spcAft>
-            </a:pPr>
-            <a:r>
-              <a:rPr sz="1000" b="0">
-                <a:solidFill>
-                  <a:srgbClr val="94A3B8"/>
-                </a:solidFill>
-                <a:latin typeface="Calibri"/>
-              </a:rPr>
-              <a:t>Un canton deux fois plus peuplé reçoit-il deux fois plus ?</a:t>
-            </a:r>
-          </a:p>
-          <a:p>
-            <a:pPr algn="l">
-              <a:spcAft>
-                <a:spcPts val="400"/>
-              </a:spcAft>
-            </a:pPr>
-            <a:r>
-              <a:rPr sz="1300" b="1">
-                <a:solidFill>
-                  <a:srgbClr val="0F172A"/>
-                </a:solidFill>
-                <a:latin typeface="Calibri"/>
-              </a:rPr>
-              <a:t>Non : 46 % de plus, pas le double</a:t>
-            </a:r>
-          </a:p>
-          <a:p>
-            <a:pPr algn="l">
-              <a:spcAft>
-                <a:spcPts val="0"/>
-              </a:spcAft>
-            </a:pPr>
-            <a:r>
-              <a:rPr sz="950" b="0">
-                <a:solidFill>
-                  <a:srgbClr val="475569"/>
-                </a:solidFill>
-                <a:latin typeface="Calibri"/>
-              </a:rPr>
-              <a:t>Combiné au coût plat de la page précédente, cet écart coûte des bénéficiaires sans économiser un franc. La clé démographique n'est pas une recommandation — c'est l'étalon le plus neutre disponible.</a:t>
+              <a:t>Médiane des montants réellement payés sur 215 ouvrages du COSO, et non un barème. Elle porte donc les conditions de ce programme-là — main-d'œuvre du Nord, profondeur des forages, année des marchés — et se transpose mal telle quelle à une autre région.</a:t>
             </a:r>
           </a:p>
         </p:txBody>
@@ -7010,93 +7439,6 @@
       <p:sp>
         <p:nvSpPr>
           <p:cNvPr id="8" name="TextBox 7"/>
-          <p:cNvSpPr txBox="1"/>
-          <p:nvPr/>
-        </p:nvSpPr>
-        <p:spPr>
-          <a:xfrm>
-            <a:off x="6309359" y="3383280"/>
-            <a:ext cx="5486400" cy="2286000"/>
-          </a:xfrm>
-          <a:prstGeom prst="rect">
-            <a:avLst/>
-          </a:prstGeom>
-          <a:noFill/>
-        </p:spPr>
-        <p:txBody>
-          <a:bodyPr wrap="square">
-            <a:spAutoFit/>
-          </a:bodyPr>
-          <a:lstStyle/>
-          <a:p>
-            <a:pPr algn="l">
-              <a:spcAft>
-                <a:spcPts val="200"/>
-              </a:spcAft>
-            </a:pPr>
-            <a:r>
-              <a:rPr sz="1200" b="1">
-                <a:solidFill>
-                  <a:srgbClr val="6366F1"/>
-                </a:solidFill>
-                <a:latin typeface="Calibri"/>
-              </a:rPr>
-              <a:t>Une marge déjà dégagée</a:t>
-            </a:r>
-          </a:p>
-          <a:p>
-            <a:pPr algn="l">
-              <a:spcAft>
-                <a:spcPts val="500"/>
-              </a:spcAft>
-            </a:pPr>
-            <a:r>
-              <a:rPr sz="1000" b="0">
-                <a:solidFill>
-                  <a:srgbClr val="94A3B8"/>
-                </a:solidFill>
-                <a:latin typeface="Calibri"/>
-              </a:rPr>
-              <a:t>Que dit l'écart entre estimation et contrats ?</a:t>
-            </a:r>
-          </a:p>
-          <a:p>
-            <a:pPr algn="l">
-              <a:spcAft>
-                <a:spcPts val="400"/>
-              </a:spcAft>
-            </a:pPr>
-            <a:r>
-              <a:rPr sz="1300" b="1">
-                <a:solidFill>
-                  <a:srgbClr val="0F172A"/>
-                </a:solidFill>
-                <a:latin typeface="Calibri"/>
-              </a:rPr>
-              <a:t>La mise en concurrence a tenu</a:t>
-            </a:r>
-          </a:p>
-          <a:p>
-            <a:pPr algn="l">
-              <a:spcAft>
-                <a:spcPts val="0"/>
-              </a:spcAft>
-            </a:pPr>
-            <a:r>
-              <a:rPr sz="950" b="0">
-                <a:solidFill>
-                  <a:srgbClr val="475569"/>
-                </a:solidFill>
-                <a:latin typeface="Calibri"/>
-              </a:rPr>
-              <a:t>L'estimation portait 4,2 milliards, les contrats signés 3,5. Cet écart est une marge dégagée à l'appel d'offres, pas une économie de réalisation : le montant payé colle aux contrats.</a:t>
-            </a:r>
-          </a:p>
-        </p:txBody>
-      </p:sp>
-      <p:sp>
-        <p:nvSpPr>
-          <p:cNvPr id="9" name="TextBox 8"/>
           <p:cNvSpPr txBox="1"/>
           <p:nvPr/>
         </p:nvSpPr>
@@ -7180,7 +7522,7 @@
                 </a:solidFill>
                 <a:latin typeface="Calibri"/>
               </a:rPr>
-              <a:t>9 · Trois leviers, par coût croissant</a:t>
+              <a:t>9 · Deux programmes datés, canton par canton</a:t>
             </a:r>
           </a:p>
           <a:p>
@@ -7196,7 +7538,7 @@
                 </a:solidFill>
                 <a:latin typeface="Calibri"/>
               </a:rPr>
-              <a:t>Chacun découle d'un chiffre de ce rapport, aucun d'une opinion</a:t>
+              <a:t>Ce que le tableau de bord place sur la carte : un chantier, une année, un montant</a:t>
             </a:r>
           </a:p>
         </p:txBody>
@@ -7230,16 +7572,34 @@
           <a:p/>
         </p:txBody>
       </p:sp>
-      <p:sp>
-        <p:nvSpPr>
-          <p:cNvPr id="4" name="TextBox 3"/>
+      <p:graphicFrame>
+        <p:nvGraphicFramePr>
+          <p:cNvPr id="4" name="Chart 3"/>
+          <p:cNvGraphicFramePr>
+            <a:graphicFrameLocks noGrp="1"/>
+          </p:cNvGraphicFramePr>
+          <p:nvPr/>
+        </p:nvGraphicFramePr>
+        <p:xfrm>
+          <a:off x="548640" y="1645920"/>
+          <a:ext cx="6675120" cy="4206240"/>
+        </p:xfrm>
+        <a:graphic>
+          <a:graphicData uri="http://schemas.openxmlformats.org/drawingml/2006/chart">
+            <c:chart xmlns:c="http://schemas.openxmlformats.org/drawingml/2006/chart" r:id="rId2"/>
+          </a:graphicData>
+        </a:graphic>
+      </p:graphicFrame>
+      <p:sp>
+        <p:nvSpPr>
+          <p:cNvPr id="5" name="TextBox 4"/>
           <p:cNvSpPr txBox="1"/>
           <p:nvPr/>
         </p:nvSpPr>
         <p:spPr>
           <a:xfrm>
-            <a:off x="548640" y="1691640"/>
-            <a:ext cx="11064240" cy="1371600"/>
+            <a:off x="7589520" y="1737360"/>
+            <a:ext cx="3931920" cy="1188720"/>
           </a:xfrm>
           <a:prstGeom prst="rect">
             <a:avLst/>
@@ -7258,75 +7618,59 @@
               </a:spcAft>
             </a:pPr>
             <a:r>
-              <a:rPr sz="1200" b="1">
+              <a:rPr sz="1100" b="0">
+                <a:solidFill>
+                  <a:srgbClr val="94A3B8"/>
+                </a:solidFill>
+                <a:latin typeface="Calibri"/>
+              </a:rPr>
+              <a:t>Programme d'ouvrages</a:t>
+            </a:r>
+          </a:p>
+          <a:p>
+            <a:pPr algn="l">
+              <a:spcAft>
+                <a:spcPts val="200"/>
+              </a:spcAft>
+            </a:pPr>
+            <a:r>
+              <a:rPr sz="3200" b="1">
                 <a:solidFill>
                   <a:srgbClr val="6366F1"/>
                 </a:solidFill>
                 <a:latin typeface="Calibri"/>
               </a:rPr>
-              <a:t>1 · Republier</a:t>
-            </a:r>
-          </a:p>
-          <a:p>
-            <a:pPr algn="l">
-              <a:spcAft>
-                <a:spcPts val="500"/>
+              <a:t>27,6 Md</a:t>
+            </a:r>
+          </a:p>
+          <a:p>
+            <a:pPr algn="l">
+              <a:spcAft>
+                <a:spcPts val="0"/>
               </a:spcAft>
             </a:pPr>
             <a:r>
               <a:rPr sz="1000" b="0">
                 <a:solidFill>
-                  <a:srgbClr val="94A3B8"/>
-                </a:solidFill>
-                <a:latin typeface="Calibri"/>
-              </a:rPr>
-              <a:t>Que coûte la donnée manquante ?</a:t>
-            </a:r>
-          </a:p>
-          <a:p>
-            <a:pPr algn="l">
-              <a:spcAft>
-                <a:spcPts val="400"/>
-              </a:spcAft>
-            </a:pPr>
-            <a:r>
-              <a:rPr sz="1300" b="1">
-                <a:solidFill>
-                  <a:srgbClr val="0F172A"/>
-                </a:solidFill>
-                <a:latin typeface="Calibri"/>
-              </a:rPr>
-              <a:t>26 champs décrits et non diffusés</a:t>
-            </a:r>
-          </a:p>
-          <a:p>
-            <a:pPr algn="l">
-              <a:spcAft>
-                <a:spcPts val="0"/>
-              </a:spcAft>
-            </a:pPr>
-            <a:r>
-              <a:rPr sz="950" b="0">
-                <a:solidFill>
                   <a:srgbClr val="475569"/>
                 </a:solidFill>
                 <a:latin typeface="Calibri"/>
               </a:rPr>
-              <a:t>L'état de fonctionnement, le débit, la profondeur et la société de maintenance figurent au dictionnaire du producteur : ils sont collectés. Le coût est celui d'une exportation, pas d'une enquête.</a:t>
-            </a:r>
-          </a:p>
-        </p:txBody>
-      </p:sp>
-      <p:sp>
-        <p:nvSpPr>
-          <p:cNvPr id="5" name="TextBox 4"/>
+              <a:t>1 651 ouvrages en 5 ans, 1 pour 5 000 habitants</a:t>
+            </a:r>
+          </a:p>
+        </p:txBody>
+      </p:sp>
+      <p:sp>
+        <p:nvSpPr>
+          <p:cNvPr id="6" name="TextBox 5"/>
           <p:cNvSpPr txBox="1"/>
           <p:nvPr/>
         </p:nvSpPr>
         <p:spPr>
           <a:xfrm>
-            <a:off x="548640" y="3200400"/>
-            <a:ext cx="11064240" cy="1371600"/>
+            <a:off x="7589520" y="3063240"/>
+            <a:ext cx="3931920" cy="1188720"/>
           </a:xfrm>
           <a:prstGeom prst="rect">
             <a:avLst/>
@@ -7345,75 +7689,59 @@
               </a:spcAft>
             </a:pPr>
             <a:r>
-              <a:rPr sz="1200" b="1">
-                <a:solidFill>
-                  <a:srgbClr val="6366F1"/>
-                </a:solidFill>
-                <a:latin typeface="Calibri"/>
-              </a:rPr>
-              <a:t>2 · Étendre l'inventaire</a:t>
-            </a:r>
-          </a:p>
-          <a:p>
-            <a:pPr algn="l">
-              <a:spcAft>
-                <a:spcPts val="500"/>
+              <a:rPr sz="1100" b="0">
+                <a:solidFill>
+                  <a:srgbClr val="94A3B8"/>
+                </a:solidFill>
+                <a:latin typeface="Calibri"/>
+              </a:rPr>
+              <a:t>Programme inondations</a:t>
+            </a:r>
+          </a:p>
+          <a:p>
+            <a:pPr algn="l">
+              <a:spcAft>
+                <a:spcPts val="200"/>
+              </a:spcAft>
+            </a:pPr>
+            <a:r>
+              <a:rPr sz="3200" b="1">
+                <a:solidFill>
+                  <a:srgbClr val="D03B3B"/>
+                </a:solidFill>
+                <a:latin typeface="Calibri"/>
+              </a:rPr>
+              <a:t>4,2 Md</a:t>
+            </a:r>
+          </a:p>
+          <a:p>
+            <a:pPr algn="l">
+              <a:spcAft>
+                <a:spcPts val="0"/>
               </a:spcAft>
             </a:pPr>
             <a:r>
               <a:rPr sz="1000" b="0">
                 <a:solidFill>
-                  <a:srgbClr val="94A3B8"/>
-                </a:solidFill>
-                <a:latin typeface="Calibri"/>
-              </a:rPr>
-              <a:t>Où recenser en priorité ?</a:t>
-            </a:r>
-          </a:p>
-          <a:p>
-            <a:pPr algn="l">
-              <a:spcAft>
-                <a:spcPts val="400"/>
-              </a:spcAft>
-            </a:pPr>
-            <a:r>
-              <a:rPr sz="1300" b="1">
-                <a:solidFill>
-                  <a:srgbClr val="0F172A"/>
-                </a:solidFill>
-                <a:latin typeface="Calibri"/>
-              </a:rPr>
-              <a:t>12 cantons exposés et non couverts</a:t>
-            </a:r>
-          </a:p>
-          <a:p>
-            <a:pPr algn="l">
-              <a:spcAft>
-                <a:spcPts val="0"/>
-              </a:spcAft>
-            </a:pPr>
-            <a:r>
-              <a:rPr sz="950" b="0">
-                <a:solidFill>
                   <a:srgbClr val="475569"/>
                 </a:solidFill>
                 <a:latin typeface="Calibri"/>
               </a:rPr>
-              <a:t>Recenser l'existant précède toute construction : on ne peut pas décider d'un forage là où l'on ignore ce qui existe déjà. Le coût est celui d'une campagne de terrain.</a:t>
-            </a:r>
-          </a:p>
-        </p:txBody>
-      </p:sp>
-      <p:sp>
-        <p:nvSpPr>
-          <p:cNvPr id="6" name="TextBox 5"/>
+              <a:t>17 cantons en 3 ans · 250,0 M FCFA l'aménagement, coût POSÉ</a:t>
+            </a:r>
+          </a:p>
+        </p:txBody>
+      </p:sp>
+      <p:sp>
+        <p:nvSpPr>
+          <p:cNvPr id="7" name="TextBox 6"/>
           <p:cNvSpPr txBox="1"/>
           <p:nvPr/>
         </p:nvSpPr>
         <p:spPr>
           <a:xfrm>
-            <a:off x="548640" y="4709160"/>
-            <a:ext cx="11064240" cy="1371600"/>
+            <a:off x="7589520" y="4389120"/>
+            <a:ext cx="3931920" cy="1554480"/>
           </a:xfrm>
           <a:prstGeom prst="rect">
             <a:avLst/>
@@ -7438,7 +7766,7 @@
                 </a:solidFill>
                 <a:latin typeface="Calibri"/>
               </a:rPr>
-              <a:t>3 · Construire</a:t>
+              <a:t>L'entretien, qu'on oublie</a:t>
             </a:r>
           </a:p>
           <a:p>
@@ -7454,7 +7782,7 @@
                 </a:solidFill>
                 <a:latin typeface="Calibri"/>
               </a:rPr>
-              <a:t>À quel ordre de grandeur ?</a:t>
+              <a:t>Que coûte le parc une fois livré ?</a:t>
             </a:r>
           </a:p>
           <a:p>
@@ -7470,7 +7798,7 @@
                 </a:solidFill>
                 <a:latin typeface="Calibri"/>
               </a:rPr>
-              <a:t>21 202 FCFA par bénéficiaire direct</a:t>
+              <a:t>11 % de l'investissement, au taux observé</a:t>
             </a:r>
           </a:p>
           <a:p>
@@ -7486,14 +7814,14 @@
                 </a:solidFill>
                 <a:latin typeface="Calibri"/>
               </a:rPr>
-              <a:t>Médiane observée sur le parc COSO. Puisque le coût d'un ouvrage ne dépend pas de sa population desservie, siter en zone dense divise mécaniquement ce ratio.</a:t>
-            </a:r>
-          </a:p>
-        </p:txBody>
-      </p:sp>
-      <p:sp>
-        <p:nvSpPr>
-          <p:cNvPr id="7" name="TextBox 6"/>
+              <a:t>Le COSO provisionne 1,35 % du montant d'un ouvrage pour son entretien. Aux taux usuels de trois à huit pour cent, la charge cumulée atteindrait 64 % de l'investissement à l'horizon. Un parc construit sans être doté s'arrête — et c'est précisément l'arrêt que le corpus ne permet pas de constater.</a:t>
+            </a:r>
+          </a:p>
+        </p:txBody>
+      </p:sp>
+      <p:sp>
+        <p:nvSpPr>
+          <p:cNvPr id="8" name="TextBox 7"/>
           <p:cNvSpPr txBox="1"/>
           <p:nvPr/>
         </p:nvSpPr>

--- a/Togo-environnement-hydrolique/rapport/Togo_Eau_Assainissement_Rapport.pptx
+++ b/Togo-environnement-hydrolique/rapport/Togo_Eau_Assainissement_Rapport.pptx
@@ -141,6 +141,7 @@
       <c:barChart>
         <c:barDir val="bar"/>
         <c:grouping val="clustered"/>
+        <c:varyColors val="0"/>
         <c:ser>
           <c:idx val="0"/>
           <c:order val="0"/>
@@ -155,6 +156,14 @@
               </c:strCache>
             </c:strRef>
           </c:tx>
+          <c:spPr>
+            <a:solidFill>
+              <a:srgbClr val="2A78D6"/>
+            </a:solidFill>
+            <a:ln>
+              <a:noFill/>
+            </a:ln>
+          </c:spPr>
           <c:cat>
             <c:strRef>
               <c:f>Sheet1!$A$2:$A$4</c:f>
@@ -272,6 +281,7 @@
       <c:barChart>
         <c:barDir val="bar"/>
         <c:grouping val="clustered"/>
+        <c:varyColors val="0"/>
         <c:ser>
           <c:idx val="0"/>
           <c:order val="0"/>
@@ -286,6 +296,14 @@
               </c:strCache>
             </c:strRef>
           </c:tx>
+          <c:spPr>
+            <a:solidFill>
+              <a:srgbClr val="2A78D6"/>
+            </a:solidFill>
+            <a:ln>
+              <a:noFill/>
+            </a:ln>
+          </c:spPr>
           <c:cat>
             <c:strRef>
               <c:f>Sheet1!$A$2:$A$4</c:f>
@@ -403,6 +421,7 @@
       <c:barChart>
         <c:barDir val="bar"/>
         <c:grouping val="clustered"/>
+        <c:varyColors val="0"/>
         <c:ser>
           <c:idx val="0"/>
           <c:order val="0"/>
@@ -417,6 +436,14 @@
               </c:strCache>
             </c:strRef>
           </c:tx>
+          <c:spPr>
+            <a:solidFill>
+              <a:srgbClr val="2A78D6"/>
+            </a:solidFill>
+            <a:ln>
+              <a:noFill/>
+            </a:ln>
+          </c:spPr>
           <c:cat>
             <c:strRef>
               <c:f>Sheet1!$A$2:$A$6</c:f>
@@ -546,6 +573,7 @@
       <c:barChart>
         <c:barDir val="bar"/>
         <c:grouping val="clustered"/>
+        <c:varyColors val="0"/>
         <c:ser>
           <c:idx val="0"/>
           <c:order val="0"/>
@@ -560,6 +588,14 @@
               </c:strCache>
             </c:strRef>
           </c:tx>
+          <c:spPr>
+            <a:solidFill>
+              <a:srgbClr val="2A78D6"/>
+            </a:solidFill>
+            <a:ln>
+              <a:noFill/>
+            </a:ln>
+          </c:spPr>
           <c:cat>
             <c:strRef>
               <c:f>Sheet1!$A$2:$A$6</c:f>
@@ -689,6 +725,7 @@
       <c:barChart>
         <c:barDir val="bar"/>
         <c:grouping val="clustered"/>
+        <c:varyColors val="0"/>
         <c:ser>
           <c:idx val="0"/>
           <c:order val="0"/>
@@ -703,6 +740,14 @@
               </c:strCache>
             </c:strRef>
           </c:tx>
+          <c:spPr>
+            <a:solidFill>
+              <a:srgbClr val="2A78D6"/>
+            </a:solidFill>
+            <a:ln>
+              <a:noFill/>
+            </a:ln>
+          </c:spPr>
           <c:cat>
             <c:strRef>
               <c:f>Sheet1!$A$2:$A$6</c:f>
@@ -832,6 +877,7 @@
       <c:barChart>
         <c:barDir val="bar"/>
         <c:grouping val="clustered"/>
+        <c:varyColors val="0"/>
         <c:ser>
           <c:idx val="0"/>
           <c:order val="0"/>
@@ -846,6 +892,14 @@
               </c:strCache>
             </c:strRef>
           </c:tx>
+          <c:spPr>
+            <a:solidFill>
+              <a:srgbClr val="2A78D6"/>
+            </a:solidFill>
+            <a:ln>
+              <a:noFill/>
+            </a:ln>
+          </c:spPr>
           <c:cat>
             <c:strRef>
               <c:f>Sheet1!$A$2:$A$4</c:f>
@@ -963,6 +1017,7 @@
       <c:barChart>
         <c:barDir val="bar"/>
         <c:grouping val="clustered"/>
+        <c:varyColors val="0"/>
         <c:ser>
           <c:idx val="0"/>
           <c:order val="0"/>
@@ -977,6 +1032,14 @@
               </c:strCache>
             </c:strRef>
           </c:tx>
+          <c:spPr>
+            <a:solidFill>
+              <a:srgbClr val="2A78D6"/>
+            </a:solidFill>
+            <a:ln>
+              <a:noFill/>
+            </a:ln>
+          </c:spPr>
           <c:cat>
             <c:strRef>
               <c:f>Sheet1!$A$2:$A$6</c:f>
